--- a/CFO_Finance_Controlling_Transformation_EN.pptx
+++ b/CFO_Finance_Controlling_Transformation_EN.pptx
@@ -20,6 +20,7 @@
     <p:sldId id="268" r:id="rId20"/>
     <p:sldId id="269" r:id="rId21"/>
     <p:sldId id="270" r:id="rId22"/>
+    <p:sldId id="271" r:id="rId23"/>
   </p:sldIdLst>
   <p:sldSz cx="12191695" cy="6858000" type="screen4x3"/>
   <p:notesSz cx="6858000" cy="9144000"/>
@@ -866,7 +867,7 @@
           <a:lstStyle/>
           <a:p>
             <a:r>
-              <a:t>Finally, a low-risk, verifiable commitment: exactly what I deliver at 30, 60 and 90 days. I have only one request today — authorize me to lead the KPI alignment and have each entity nominate a single data contact. It costs nothing, yet it starts the whole transformation. Thank you; I look forward to joining the team.</a:t>
+              <a:t>This is where I see Finance heading. The autonomous AI engine in the middle runs the repetitive work end-to-end — monthly close, planning and forecasting, expense accruals, reconciliations, reporting, and continuous controls. People move to the top layer: we govern and assure it, we manage and maintain it, and — most importantly — we use creativity to keep improving its performance, while partnering with the business. Note the loop: people guide and improve the AI; the AI returns results, exceptions and insights. The shift is from doing the work to designing and improving the system that does it.</a:t>
             </a:r>
           </a:p>
         </p:txBody>
@@ -892,6 +893,76 @@
 </file>
 
 <file path=ppt/notesSlides/notesSlide15.xml><?xml version="1.0" encoding="utf-8"?>
+<p:notes xmlns:a="http://schemas.openxmlformats.org/drawingml/2006/main" xmlns:p="http://schemas.openxmlformats.org/presentationml/2006/main" xmlns:r="http://schemas.openxmlformats.org/officeDocument/2006/relationships">
+  <p:cSld>
+    <p:spTree>
+      <p:nvGrpSpPr>
+        <p:cNvPr id="1" name=""/>
+        <p:cNvGrpSpPr/>
+        <p:nvPr/>
+      </p:nvGrpSpPr>
+      <p:grpSpPr>
+        <a:xfrm>
+          <a:off x="0" y="0"/>
+          <a:ext cx="0" cy="0"/>
+          <a:chOff x="0" y="0"/>
+          <a:chExt cx="0" cy="0"/>
+        </a:xfrm>
+      </p:grpSpPr>
+      <p:sp>
+        <p:nvSpPr>
+          <p:cNvPr id="2" name="Slide Image Placeholder 1"/>
+          <p:cNvSpPr>
+            <a:spLocks noGrp="1"/>
+          </p:cNvSpPr>
+          <p:nvPr>
+            <p:ph type="sldImg" idx="2"/>
+          </p:nvPr>
+        </p:nvSpPr>
+        <p:spPr/>
+      </p:sp>
+      <p:sp>
+        <p:nvSpPr>
+          <p:cNvPr id="3" name="Notes Placeholder 2"/>
+          <p:cNvSpPr>
+            <a:spLocks noGrp="1"/>
+          </p:cNvSpPr>
+          <p:nvPr>
+            <p:ph type="body" idx="3" sz="quarter"/>
+          </p:nvPr>
+        </p:nvSpPr>
+        <p:spPr/>
+        <p:txBody>
+          <a:bodyPr/>
+          <a:lstStyle/>
+          <a:p>
+            <a:r>
+              <a:t>Finally, a low-risk, verifiable commitment: exactly what I deliver at 30, 60 and 90 days. I have only one request today — authorize me to lead the KPI alignment and have each entity nominate a single data contact. It costs nothing, yet it starts the whole transformation. Thank you; I look forward to joining the team.</a:t>
+            </a:r>
+          </a:p>
+        </p:txBody>
+      </p:sp>
+      <p:sp>
+        <p:nvSpPr>
+          <p:cNvPr id="4" name="Slide Number Placeholder 3"/>
+          <p:cNvSpPr>
+            <a:spLocks noGrp="1"/>
+          </p:cNvSpPr>
+          <p:nvPr>
+            <p:ph type="sldNum" idx="5" sz="quarter"/>
+          </p:nvPr>
+        </p:nvSpPr>
+        <p:spPr/>
+      </p:sp>
+    </p:spTree>
+  </p:cSld>
+  <p:clrMapOvr>
+    <a:masterClrMapping/>
+  </p:clrMapOvr>
+</p:notes>
+</file>
+
+<file path=ppt/notesSlides/notesSlide16.xml><?xml version="1.0" encoding="utf-8"?>
 <p:notes xmlns:a="http://schemas.openxmlformats.org/drawingml/2006/main" xmlns:p="http://schemas.openxmlformats.org/presentationml/2006/main" xmlns:r="http://schemas.openxmlformats.org/officeDocument/2006/relationships">
   <p:cSld>
     <p:spTree>
@@ -8340,7 +8411,7 @@
                 </a:solidFill>
                 <a:latin typeface="Calibri"/>
               </a:rPr>
-              <a:t>12 · FIRST 90 DAYS</a:t>
+              <a:t>12 · FUTURE VISION</a:t>
             </a:r>
           </a:p>
         </p:txBody>
@@ -8382,7 +8453,7 @@
                 </a:solidFill>
                 <a:latin typeface="Calibri Light"/>
               </a:rPr>
-              <a:t>90-day commitment + the ask</a:t>
+              <a:t>AI runs the routine — people manage it and create</a:t>
             </a:r>
           </a:p>
         </p:txBody>
@@ -8559,16 +8630,755 @@
       </p:sp>
       <p:sp>
         <p:nvSpPr>
-          <p:cNvPr id="11" name="Rectangle 10"/>
+          <p:cNvPr id="11" name="Rounded Rectangle 10"/>
           <p:cNvSpPr/>
           <p:nvPr/>
         </p:nvSpPr>
         <p:spPr>
           <a:xfrm>
-            <a:off x="640080" y="1463040"/>
-            <a:ext cx="1828800" cy="896112"/>
-          </a:xfrm>
-          <a:prstGeom prst="rect">
+            <a:off x="640080" y="1207008"/>
+            <a:ext cx="10908792" cy="1225296"/>
+          </a:xfrm>
+          <a:prstGeom prst="roundRect">
+            <a:avLst/>
+          </a:prstGeom>
+          <a:solidFill>
+            <a:srgbClr val="F2F5F8"/>
+          </a:solidFill>
+          <a:ln w="12700">
+            <a:solidFill>
+              <a:srgbClr val="D9E0E7"/>
+            </a:solidFill>
+          </a:ln>
+          <a:effectLst/>
+        </p:spPr>
+        <p:style>
+          <a:lnRef idx="1">
+            <a:schemeClr val="accent1"/>
+          </a:lnRef>
+          <a:fillRef idx="3">
+            <a:schemeClr val="accent1"/>
+          </a:fillRef>
+          <a:effectRef idx="2">
+            <a:schemeClr val="accent1"/>
+          </a:effectRef>
+          <a:fontRef idx="minor">
+            <a:schemeClr val="lt1"/>
+          </a:fontRef>
+        </p:style>
+        <p:txBody>
+          <a:bodyPr rtlCol="0" anchor="ctr"/>
+          <a:lstStyle/>
+          <a:p>
+            <a:pPr algn="ctr"/>
+          </a:p>
+        </p:txBody>
+      </p:sp>
+      <p:sp>
+        <p:nvSpPr>
+          <p:cNvPr id="12" name="Rounded Rectangle 11"/>
+          <p:cNvSpPr/>
+          <p:nvPr/>
+        </p:nvSpPr>
+        <p:spPr>
+          <a:xfrm>
+            <a:off x="640080" y="1207008"/>
+            <a:ext cx="146304" cy="1225296"/>
+          </a:xfrm>
+          <a:prstGeom prst="roundRect">
+            <a:avLst/>
+          </a:prstGeom>
+          <a:solidFill>
+            <a:srgbClr val="1F3A5F"/>
+          </a:solidFill>
+          <a:ln>
+            <a:noFill/>
+          </a:ln>
+          <a:effectLst/>
+        </p:spPr>
+        <p:style>
+          <a:lnRef idx="1">
+            <a:schemeClr val="accent1"/>
+          </a:lnRef>
+          <a:fillRef idx="3">
+            <a:schemeClr val="accent1"/>
+          </a:fillRef>
+          <a:effectRef idx="2">
+            <a:schemeClr val="accent1"/>
+          </a:effectRef>
+          <a:fontRef idx="minor">
+            <a:schemeClr val="lt1"/>
+          </a:fontRef>
+        </p:style>
+        <p:txBody>
+          <a:bodyPr rtlCol="0" anchor="ctr"/>
+          <a:lstStyle/>
+          <a:p>
+            <a:pPr algn="ctr"/>
+          </a:p>
+        </p:txBody>
+      </p:sp>
+      <p:sp>
+        <p:nvSpPr>
+          <p:cNvPr id="13" name="TextBox 12"/>
+          <p:cNvSpPr txBox="1"/>
+          <p:nvPr/>
+        </p:nvSpPr>
+        <p:spPr>
+          <a:xfrm>
+            <a:off x="914400" y="1280160"/>
+            <a:ext cx="10332720" cy="310896"/>
+          </a:xfrm>
+          <a:prstGeom prst="rect">
+            <a:avLst/>
+          </a:prstGeom>
+          <a:noFill/>
+        </p:spPr>
+        <p:txBody>
+          <a:bodyPr wrap="square" anchor="t">
+            <a:spAutoFit/>
+          </a:bodyPr>
+          <a:lstStyle/>
+          <a:p>
+            <a:pPr algn="l">
+              <a:lnSpc>
+                <a:spcPct val="105000"/>
+              </a:lnSpc>
+              <a:spcAft>
+                <a:spcPts val="600"/>
+              </a:spcAft>
+            </a:pPr>
+            <a:r>
+              <a:rPr sz="1300" b="1">
+                <a:solidFill>
+                  <a:srgbClr val="1F3A5F"/>
+                </a:solidFill>
+                <a:latin typeface="Calibri"/>
+              </a:rPr>
+              <a:t>PEOPLE  ·  </a:t>
+            </a:r>
+            <a:r>
+              <a:rPr sz="1300" b="1">
+                <a:solidFill>
+                  <a:srgbClr val="5A6B7B"/>
+                </a:solidFill>
+                <a:latin typeface="Calibri"/>
+              </a:rPr>
+              <a:t>govern, maintain &amp; elevate the AI</a:t>
+            </a:r>
+          </a:p>
+        </p:txBody>
+      </p:sp>
+      <p:sp>
+        <p:nvSpPr>
+          <p:cNvPr id="14" name="Rounded Rectangle 13"/>
+          <p:cNvSpPr/>
+          <p:nvPr/>
+        </p:nvSpPr>
+        <p:spPr>
+          <a:xfrm>
+            <a:off x="914400" y="1664208"/>
+            <a:ext cx="2542032" cy="658368"/>
+          </a:xfrm>
+          <a:prstGeom prst="roundRect">
+            <a:avLst/>
+          </a:prstGeom>
+          <a:solidFill>
+            <a:srgbClr val="1F3A5F"/>
+          </a:solidFill>
+          <a:ln>
+            <a:noFill/>
+          </a:ln>
+          <a:effectLst/>
+        </p:spPr>
+        <p:style>
+          <a:lnRef idx="1">
+            <a:schemeClr val="accent1"/>
+          </a:lnRef>
+          <a:fillRef idx="3">
+            <a:schemeClr val="accent1"/>
+          </a:fillRef>
+          <a:effectRef idx="2">
+            <a:schemeClr val="accent1"/>
+          </a:effectRef>
+          <a:fontRef idx="minor">
+            <a:schemeClr val="lt1"/>
+          </a:fontRef>
+        </p:style>
+        <p:txBody>
+          <a:bodyPr rtlCol="0" anchor="ctr"/>
+          <a:lstStyle/>
+          <a:p>
+            <a:pPr algn="ctr"/>
+          </a:p>
+        </p:txBody>
+      </p:sp>
+      <p:sp>
+        <p:nvSpPr>
+          <p:cNvPr id="15" name="TextBox 14"/>
+          <p:cNvSpPr txBox="1"/>
+          <p:nvPr/>
+        </p:nvSpPr>
+        <p:spPr>
+          <a:xfrm>
+            <a:off x="1024128" y="1719072"/>
+            <a:ext cx="2322576" cy="274320"/>
+          </a:xfrm>
+          <a:prstGeom prst="rect">
+            <a:avLst/>
+          </a:prstGeom>
+          <a:noFill/>
+        </p:spPr>
+        <p:txBody>
+          <a:bodyPr wrap="square" anchor="t">
+            <a:spAutoFit/>
+          </a:bodyPr>
+          <a:lstStyle/>
+          <a:p>
+            <a:pPr algn="l">
+              <a:lnSpc>
+                <a:spcPct val="105000"/>
+              </a:lnSpc>
+              <a:spcAft>
+                <a:spcPts val="600"/>
+              </a:spcAft>
+            </a:pPr>
+            <a:r>
+              <a:rPr sz="1150" b="1">
+                <a:solidFill>
+                  <a:srgbClr val="FFFFFF"/>
+                </a:solidFill>
+                <a:latin typeface="Calibri"/>
+              </a:rPr>
+              <a:t>Govern &amp; assure</a:t>
+            </a:r>
+          </a:p>
+        </p:txBody>
+      </p:sp>
+      <p:sp>
+        <p:nvSpPr>
+          <p:cNvPr id="16" name="TextBox 15"/>
+          <p:cNvSpPr txBox="1"/>
+          <p:nvPr/>
+        </p:nvSpPr>
+        <p:spPr>
+          <a:xfrm>
+            <a:off x="1024128" y="2002536"/>
+            <a:ext cx="2322576" cy="274320"/>
+          </a:xfrm>
+          <a:prstGeom prst="rect">
+            <a:avLst/>
+          </a:prstGeom>
+          <a:noFill/>
+        </p:spPr>
+        <p:txBody>
+          <a:bodyPr wrap="square" anchor="t">
+            <a:spAutoFit/>
+          </a:bodyPr>
+          <a:lstStyle/>
+          <a:p>
+            <a:pPr algn="l">
+              <a:lnSpc>
+                <a:spcPct val="105000"/>
+              </a:lnSpc>
+              <a:spcAft>
+                <a:spcPts val="600"/>
+              </a:spcAft>
+            </a:pPr>
+            <a:r>
+              <a:rPr sz="900" b="0">
+                <a:solidFill>
+                  <a:srgbClr val="C9D6E4"/>
+                </a:solidFill>
+                <a:latin typeface="Calibri"/>
+              </a:rPr>
+              <a:t>controls, ethics, sign-off</a:t>
+            </a:r>
+          </a:p>
+        </p:txBody>
+      </p:sp>
+      <p:sp>
+        <p:nvSpPr>
+          <p:cNvPr id="17" name="Rounded Rectangle 16"/>
+          <p:cNvSpPr/>
+          <p:nvPr/>
+        </p:nvSpPr>
+        <p:spPr>
+          <a:xfrm>
+            <a:off x="3575304" y="1664208"/>
+            <a:ext cx="2542032" cy="658368"/>
+          </a:xfrm>
+          <a:prstGeom prst="roundRect">
+            <a:avLst/>
+          </a:prstGeom>
+          <a:solidFill>
+            <a:srgbClr val="1F3A5F"/>
+          </a:solidFill>
+          <a:ln>
+            <a:noFill/>
+          </a:ln>
+          <a:effectLst/>
+        </p:spPr>
+        <p:style>
+          <a:lnRef idx="1">
+            <a:schemeClr val="accent1"/>
+          </a:lnRef>
+          <a:fillRef idx="3">
+            <a:schemeClr val="accent1"/>
+          </a:fillRef>
+          <a:effectRef idx="2">
+            <a:schemeClr val="accent1"/>
+          </a:effectRef>
+          <a:fontRef idx="minor">
+            <a:schemeClr val="lt1"/>
+          </a:fontRef>
+        </p:style>
+        <p:txBody>
+          <a:bodyPr rtlCol="0" anchor="ctr"/>
+          <a:lstStyle/>
+          <a:p>
+            <a:pPr algn="ctr"/>
+          </a:p>
+        </p:txBody>
+      </p:sp>
+      <p:sp>
+        <p:nvSpPr>
+          <p:cNvPr id="18" name="TextBox 17"/>
+          <p:cNvSpPr txBox="1"/>
+          <p:nvPr/>
+        </p:nvSpPr>
+        <p:spPr>
+          <a:xfrm>
+            <a:off x="3685032" y="1719072"/>
+            <a:ext cx="2322576" cy="274320"/>
+          </a:xfrm>
+          <a:prstGeom prst="rect">
+            <a:avLst/>
+          </a:prstGeom>
+          <a:noFill/>
+        </p:spPr>
+        <p:txBody>
+          <a:bodyPr wrap="square" anchor="t">
+            <a:spAutoFit/>
+          </a:bodyPr>
+          <a:lstStyle/>
+          <a:p>
+            <a:pPr algn="l">
+              <a:lnSpc>
+                <a:spcPct val="105000"/>
+              </a:lnSpc>
+              <a:spcAft>
+                <a:spcPts val="600"/>
+              </a:spcAft>
+            </a:pPr>
+            <a:r>
+              <a:rPr sz="1150" b="1">
+                <a:solidFill>
+                  <a:srgbClr val="FFFFFF"/>
+                </a:solidFill>
+                <a:latin typeface="Calibri"/>
+              </a:rPr>
+              <a:t>Manage &amp; maintain AI</a:t>
+            </a:r>
+          </a:p>
+        </p:txBody>
+      </p:sp>
+      <p:sp>
+        <p:nvSpPr>
+          <p:cNvPr id="19" name="TextBox 18"/>
+          <p:cNvSpPr txBox="1"/>
+          <p:nvPr/>
+        </p:nvSpPr>
+        <p:spPr>
+          <a:xfrm>
+            <a:off x="3685032" y="2002536"/>
+            <a:ext cx="2322576" cy="274320"/>
+          </a:xfrm>
+          <a:prstGeom prst="rect">
+            <a:avLst/>
+          </a:prstGeom>
+          <a:noFill/>
+        </p:spPr>
+        <p:txBody>
+          <a:bodyPr wrap="square" anchor="t">
+            <a:spAutoFit/>
+          </a:bodyPr>
+          <a:lstStyle/>
+          <a:p>
+            <a:pPr algn="l">
+              <a:lnSpc>
+                <a:spcPct val="105000"/>
+              </a:lnSpc>
+              <a:spcAft>
+                <a:spcPts val="600"/>
+              </a:spcAft>
+            </a:pPr>
+            <a:r>
+              <a:rPr sz="900" b="0">
+                <a:solidFill>
+                  <a:srgbClr val="C9D6E4"/>
+                </a:solidFill>
+                <a:latin typeface="Calibri"/>
+              </a:rPr>
+              <a:t>monitor, correct, retrain</a:t>
+            </a:r>
+          </a:p>
+        </p:txBody>
+      </p:sp>
+      <p:sp>
+        <p:nvSpPr>
+          <p:cNvPr id="20" name="Rounded Rectangle 19"/>
+          <p:cNvSpPr/>
+          <p:nvPr/>
+        </p:nvSpPr>
+        <p:spPr>
+          <a:xfrm>
+            <a:off x="6236208" y="1664208"/>
+            <a:ext cx="2542032" cy="658368"/>
+          </a:xfrm>
+          <a:prstGeom prst="roundRect">
+            <a:avLst/>
+          </a:prstGeom>
+          <a:solidFill>
+            <a:srgbClr val="1F3A5F"/>
+          </a:solidFill>
+          <a:ln>
+            <a:noFill/>
+          </a:ln>
+          <a:effectLst/>
+        </p:spPr>
+        <p:style>
+          <a:lnRef idx="1">
+            <a:schemeClr val="accent1"/>
+          </a:lnRef>
+          <a:fillRef idx="3">
+            <a:schemeClr val="accent1"/>
+          </a:fillRef>
+          <a:effectRef idx="2">
+            <a:schemeClr val="accent1"/>
+          </a:effectRef>
+          <a:fontRef idx="minor">
+            <a:schemeClr val="lt1"/>
+          </a:fontRef>
+        </p:style>
+        <p:txBody>
+          <a:bodyPr rtlCol="0" anchor="ctr"/>
+          <a:lstStyle/>
+          <a:p>
+            <a:pPr algn="ctr"/>
+          </a:p>
+        </p:txBody>
+      </p:sp>
+      <p:sp>
+        <p:nvSpPr>
+          <p:cNvPr id="21" name="TextBox 20"/>
+          <p:cNvSpPr txBox="1"/>
+          <p:nvPr/>
+        </p:nvSpPr>
+        <p:spPr>
+          <a:xfrm>
+            <a:off x="6345936" y="1719072"/>
+            <a:ext cx="2322576" cy="274320"/>
+          </a:xfrm>
+          <a:prstGeom prst="rect">
+            <a:avLst/>
+          </a:prstGeom>
+          <a:noFill/>
+        </p:spPr>
+        <p:txBody>
+          <a:bodyPr wrap="square" anchor="t">
+            <a:spAutoFit/>
+          </a:bodyPr>
+          <a:lstStyle/>
+          <a:p>
+            <a:pPr algn="l">
+              <a:lnSpc>
+                <a:spcPct val="105000"/>
+              </a:lnSpc>
+              <a:spcAft>
+                <a:spcPts val="600"/>
+              </a:spcAft>
+            </a:pPr>
+            <a:r>
+              <a:rPr sz="1150" b="1">
+                <a:solidFill>
+                  <a:srgbClr val="FFFFFF"/>
+                </a:solidFill>
+                <a:latin typeface="Calibri"/>
+              </a:rPr>
+              <a:t>Improve AI  ✦</a:t>
+            </a:r>
+          </a:p>
+        </p:txBody>
+      </p:sp>
+      <p:sp>
+        <p:nvSpPr>
+          <p:cNvPr id="22" name="TextBox 21"/>
+          <p:cNvSpPr txBox="1"/>
+          <p:nvPr/>
+        </p:nvSpPr>
+        <p:spPr>
+          <a:xfrm>
+            <a:off x="6345936" y="2002536"/>
+            <a:ext cx="2322576" cy="274320"/>
+          </a:xfrm>
+          <a:prstGeom prst="rect">
+            <a:avLst/>
+          </a:prstGeom>
+          <a:noFill/>
+        </p:spPr>
+        <p:txBody>
+          <a:bodyPr wrap="square" anchor="t">
+            <a:spAutoFit/>
+          </a:bodyPr>
+          <a:lstStyle/>
+          <a:p>
+            <a:pPr algn="l">
+              <a:lnSpc>
+                <a:spcPct val="105000"/>
+              </a:lnSpc>
+              <a:spcAft>
+                <a:spcPts val="600"/>
+              </a:spcAft>
+            </a:pPr>
+            <a:r>
+              <a:rPr sz="900" b="0">
+                <a:solidFill>
+                  <a:srgbClr val="C9D6E4"/>
+                </a:solidFill>
+                <a:latin typeface="Calibri"/>
+              </a:rPr>
+              <a:t>creativity: models, prompts, logic</a:t>
+            </a:r>
+          </a:p>
+        </p:txBody>
+      </p:sp>
+      <p:sp>
+        <p:nvSpPr>
+          <p:cNvPr id="23" name="Rounded Rectangle 22"/>
+          <p:cNvSpPr/>
+          <p:nvPr/>
+        </p:nvSpPr>
+        <p:spPr>
+          <a:xfrm>
+            <a:off x="8897112" y="1664208"/>
+            <a:ext cx="2542032" cy="658368"/>
+          </a:xfrm>
+          <a:prstGeom prst="roundRect">
+            <a:avLst/>
+          </a:prstGeom>
+          <a:solidFill>
+            <a:srgbClr val="1F3A5F"/>
+          </a:solidFill>
+          <a:ln>
+            <a:noFill/>
+          </a:ln>
+          <a:effectLst/>
+        </p:spPr>
+        <p:style>
+          <a:lnRef idx="1">
+            <a:schemeClr val="accent1"/>
+          </a:lnRef>
+          <a:fillRef idx="3">
+            <a:schemeClr val="accent1"/>
+          </a:fillRef>
+          <a:effectRef idx="2">
+            <a:schemeClr val="accent1"/>
+          </a:effectRef>
+          <a:fontRef idx="minor">
+            <a:schemeClr val="lt1"/>
+          </a:fontRef>
+        </p:style>
+        <p:txBody>
+          <a:bodyPr rtlCol="0" anchor="ctr"/>
+          <a:lstStyle/>
+          <a:p>
+            <a:pPr algn="ctr"/>
+          </a:p>
+        </p:txBody>
+      </p:sp>
+      <p:sp>
+        <p:nvSpPr>
+          <p:cNvPr id="24" name="TextBox 23"/>
+          <p:cNvSpPr txBox="1"/>
+          <p:nvPr/>
+        </p:nvSpPr>
+        <p:spPr>
+          <a:xfrm>
+            <a:off x="9006840" y="1719072"/>
+            <a:ext cx="2322576" cy="274320"/>
+          </a:xfrm>
+          <a:prstGeom prst="rect">
+            <a:avLst/>
+          </a:prstGeom>
+          <a:noFill/>
+        </p:spPr>
+        <p:txBody>
+          <a:bodyPr wrap="square" anchor="t">
+            <a:spAutoFit/>
+          </a:bodyPr>
+          <a:lstStyle/>
+          <a:p>
+            <a:pPr algn="l">
+              <a:lnSpc>
+                <a:spcPct val="105000"/>
+              </a:lnSpc>
+              <a:spcAft>
+                <a:spcPts val="600"/>
+              </a:spcAft>
+            </a:pPr>
+            <a:r>
+              <a:rPr sz="1150" b="1">
+                <a:solidFill>
+                  <a:srgbClr val="FFFFFF"/>
+                </a:solidFill>
+                <a:latin typeface="Calibri"/>
+              </a:rPr>
+              <a:t>Business partnering</a:t>
+            </a:r>
+          </a:p>
+        </p:txBody>
+      </p:sp>
+      <p:sp>
+        <p:nvSpPr>
+          <p:cNvPr id="25" name="TextBox 24"/>
+          <p:cNvSpPr txBox="1"/>
+          <p:nvPr/>
+        </p:nvSpPr>
+        <p:spPr>
+          <a:xfrm>
+            <a:off x="9006840" y="2002536"/>
+            <a:ext cx="2322576" cy="274320"/>
+          </a:xfrm>
+          <a:prstGeom prst="rect">
+            <a:avLst/>
+          </a:prstGeom>
+          <a:noFill/>
+        </p:spPr>
+        <p:txBody>
+          <a:bodyPr wrap="square" anchor="t">
+            <a:spAutoFit/>
+          </a:bodyPr>
+          <a:lstStyle/>
+          <a:p>
+            <a:pPr algn="l">
+              <a:lnSpc>
+                <a:spcPct val="105000"/>
+              </a:lnSpc>
+              <a:spcAft>
+                <a:spcPts val="600"/>
+              </a:spcAft>
+            </a:pPr>
+            <a:r>
+              <a:rPr sz="900" b="0">
+                <a:solidFill>
+                  <a:srgbClr val="C9D6E4"/>
+                </a:solidFill>
+                <a:latin typeface="Calibri"/>
+              </a:rPr>
+              <a:t>advise, decide, add judgment</a:t>
+            </a:r>
+          </a:p>
+        </p:txBody>
+      </p:sp>
+      <p:sp>
+        <p:nvSpPr>
+          <p:cNvPr id="26" name="Down Arrow 25"/>
+          <p:cNvSpPr/>
+          <p:nvPr/>
+        </p:nvSpPr>
+        <p:spPr>
+          <a:xfrm>
+            <a:off x="2834640" y="2487168"/>
+            <a:ext cx="457200" cy="548640"/>
+          </a:xfrm>
+          <a:prstGeom prst="downArrow">
+            <a:avLst/>
+          </a:prstGeom>
+          <a:solidFill>
+            <a:srgbClr val="2E6DA4"/>
+          </a:solidFill>
+          <a:ln>
+            <a:noFill/>
+          </a:ln>
+          <a:effectLst/>
+        </p:spPr>
+        <p:style>
+          <a:lnRef idx="1">
+            <a:schemeClr val="accent1"/>
+          </a:lnRef>
+          <a:fillRef idx="3">
+            <a:schemeClr val="accent1"/>
+          </a:fillRef>
+          <a:effectRef idx="2">
+            <a:schemeClr val="accent1"/>
+          </a:effectRef>
+          <a:fontRef idx="minor">
+            <a:schemeClr val="lt1"/>
+          </a:fontRef>
+        </p:style>
+        <p:txBody>
+          <a:bodyPr rtlCol="0" anchor="ctr"/>
+          <a:lstStyle/>
+          <a:p>
+            <a:pPr algn="ctr"/>
+          </a:p>
+        </p:txBody>
+      </p:sp>
+      <p:sp>
+        <p:nvSpPr>
+          <p:cNvPr id="27" name="TextBox 26"/>
+          <p:cNvSpPr txBox="1"/>
+          <p:nvPr/>
+        </p:nvSpPr>
+        <p:spPr>
+          <a:xfrm>
+            <a:off x="3383280" y="2560320"/>
+            <a:ext cx="2926080" cy="411480"/>
+          </a:xfrm>
+          <a:prstGeom prst="rect">
+            <a:avLst/>
+          </a:prstGeom>
+          <a:noFill/>
+        </p:spPr>
+        <p:txBody>
+          <a:bodyPr wrap="square" anchor="ctr">
+            <a:spAutoFit/>
+          </a:bodyPr>
+          <a:lstStyle/>
+          <a:p>
+            <a:pPr algn="l">
+              <a:lnSpc>
+                <a:spcPct val="105000"/>
+              </a:lnSpc>
+              <a:spcAft>
+                <a:spcPts val="600"/>
+              </a:spcAft>
+            </a:pPr>
+            <a:r>
+              <a:rPr sz="1050" b="1">
+                <a:solidFill>
+                  <a:srgbClr val="2E6DA4"/>
+                </a:solidFill>
+                <a:latin typeface="Calibri"/>
+              </a:rPr>
+              <a:t>Guide · Govern · Improve</a:t>
+            </a:r>
+          </a:p>
+        </p:txBody>
+      </p:sp>
+      <p:sp>
+        <p:nvSpPr>
+          <p:cNvPr id="28" name="Up Arrow 27"/>
+          <p:cNvSpPr/>
+          <p:nvPr/>
+        </p:nvSpPr>
+        <p:spPr>
+          <a:xfrm>
+            <a:off x="8915400" y="2487168"/>
+            <a:ext cx="457200" cy="548640"/>
+          </a:xfrm>
+          <a:prstGeom prst="upArrow">
             <a:avLst/>
           </a:prstGeom>
           <a:solidFill>
@@ -8603,14 +9413,144 @@
       </p:sp>
       <p:sp>
         <p:nvSpPr>
-          <p:cNvPr id="12" name="TextBox 11"/>
+          <p:cNvPr id="29" name="TextBox 28"/>
           <p:cNvSpPr txBox="1"/>
           <p:nvPr/>
         </p:nvSpPr>
         <p:spPr>
           <a:xfrm>
-            <a:off x="640080" y="1682496"/>
-            <a:ext cx="1828800" cy="457200"/>
+            <a:off x="5989320" y="2560320"/>
+            <a:ext cx="2834640" cy="411480"/>
+          </a:xfrm>
+          <a:prstGeom prst="rect">
+            <a:avLst/>
+          </a:prstGeom>
+          <a:noFill/>
+        </p:spPr>
+        <p:txBody>
+          <a:bodyPr wrap="square" anchor="ctr">
+            <a:spAutoFit/>
+          </a:bodyPr>
+          <a:lstStyle/>
+          <a:p>
+            <a:pPr algn="r">
+              <a:lnSpc>
+                <a:spcPct val="105000"/>
+              </a:lnSpc>
+              <a:spcAft>
+                <a:spcPts val="600"/>
+              </a:spcAft>
+            </a:pPr>
+            <a:r>
+              <a:rPr sz="1050" b="1">
+                <a:solidFill>
+                  <a:srgbClr val="178F80"/>
+                </a:solidFill>
+                <a:latin typeface="Calibri"/>
+              </a:rPr>
+              <a:t>Results · Exceptions · Insights</a:t>
+            </a:r>
+          </a:p>
+        </p:txBody>
+      </p:sp>
+      <p:sp>
+        <p:nvSpPr>
+          <p:cNvPr id="30" name="Rounded Rectangle 29"/>
+          <p:cNvSpPr/>
+          <p:nvPr/>
+        </p:nvSpPr>
+        <p:spPr>
+          <a:xfrm>
+            <a:off x="2103120" y="3127248"/>
+            <a:ext cx="7982712" cy="1024128"/>
+          </a:xfrm>
+          <a:prstGeom prst="roundRect">
+            <a:avLst/>
+          </a:prstGeom>
+          <a:solidFill>
+            <a:srgbClr val="178F80"/>
+          </a:solidFill>
+          <a:ln>
+            <a:noFill/>
+          </a:ln>
+          <a:effectLst/>
+        </p:spPr>
+        <p:style>
+          <a:lnRef idx="1">
+            <a:schemeClr val="accent1"/>
+          </a:lnRef>
+          <a:fillRef idx="3">
+            <a:schemeClr val="accent1"/>
+          </a:fillRef>
+          <a:effectRef idx="2">
+            <a:schemeClr val="accent1"/>
+          </a:effectRef>
+          <a:fontRef idx="minor">
+            <a:schemeClr val="lt1"/>
+          </a:fontRef>
+        </p:style>
+        <p:txBody>
+          <a:bodyPr rtlCol="0" anchor="ctr"/>
+          <a:lstStyle/>
+          <a:p>
+            <a:pPr algn="ctr"/>
+          </a:p>
+        </p:txBody>
+      </p:sp>
+      <p:sp>
+        <p:nvSpPr>
+          <p:cNvPr id="31" name="Rounded Rectangle 30"/>
+          <p:cNvSpPr/>
+          <p:nvPr/>
+        </p:nvSpPr>
+        <p:spPr>
+          <a:xfrm>
+            <a:off x="2331720" y="3346704"/>
+            <a:ext cx="603504" cy="603504"/>
+          </a:xfrm>
+          <a:prstGeom prst="roundRect">
+            <a:avLst/>
+          </a:prstGeom>
+          <a:solidFill>
+            <a:srgbClr val="1F3A5F"/>
+          </a:solidFill>
+          <a:ln>
+            <a:noFill/>
+          </a:ln>
+          <a:effectLst/>
+        </p:spPr>
+        <p:style>
+          <a:lnRef idx="1">
+            <a:schemeClr val="accent1"/>
+          </a:lnRef>
+          <a:fillRef idx="3">
+            <a:schemeClr val="accent1"/>
+          </a:fillRef>
+          <a:effectRef idx="2">
+            <a:schemeClr val="accent1"/>
+          </a:effectRef>
+          <a:fontRef idx="minor">
+            <a:schemeClr val="lt1"/>
+          </a:fontRef>
+        </p:style>
+        <p:txBody>
+          <a:bodyPr rtlCol="0" anchor="ctr"/>
+          <a:lstStyle/>
+          <a:p>
+            <a:pPr algn="ctr"/>
+          </a:p>
+        </p:txBody>
+      </p:sp>
+      <p:sp>
+        <p:nvSpPr>
+          <p:cNvPr id="32" name="TextBox 31"/>
+          <p:cNvSpPr txBox="1"/>
+          <p:nvPr/>
+        </p:nvSpPr>
+        <p:spPr>
+          <a:xfrm>
+            <a:off x="2331720" y="3429000"/>
+            <a:ext cx="603504" cy="457200"/>
           </a:xfrm>
           <a:prstGeom prst="rect">
             <a:avLst/>
@@ -8632,29 +9572,199 @@
               </a:spcAft>
             </a:pPr>
             <a:r>
-              <a:rPr sz="2000" b="1">
+              <a:rPr sz="1600" b="1">
                 <a:solidFill>
                   <a:srgbClr val="FFFFFF"/>
                 </a:solidFill>
                 <a:latin typeface="Calibri"/>
               </a:rPr>
-              <a:t>30 days</a:t>
-            </a:r>
-          </a:p>
-        </p:txBody>
-      </p:sp>
-      <p:sp>
-        <p:nvSpPr>
-          <p:cNvPr id="13" name="Rectangle 12"/>
+              <a:t>AI</a:t>
+            </a:r>
+          </a:p>
+        </p:txBody>
+      </p:sp>
+      <p:sp>
+        <p:nvSpPr>
+          <p:cNvPr id="33" name="TextBox 32"/>
+          <p:cNvSpPr txBox="1"/>
+          <p:nvPr/>
+        </p:nvSpPr>
+        <p:spPr>
+          <a:xfrm>
+            <a:off x="3154680" y="3273552"/>
+            <a:ext cx="6766560" cy="457200"/>
+          </a:xfrm>
+          <a:prstGeom prst="rect">
+            <a:avLst/>
+          </a:prstGeom>
+          <a:noFill/>
+        </p:spPr>
+        <p:txBody>
+          <a:bodyPr wrap="square" anchor="ctr">
+            <a:spAutoFit/>
+          </a:bodyPr>
+          <a:lstStyle/>
+          <a:p>
+            <a:pPr algn="l">
+              <a:lnSpc>
+                <a:spcPct val="105000"/>
+              </a:lnSpc>
+              <a:spcAft>
+                <a:spcPts val="600"/>
+              </a:spcAft>
+            </a:pPr>
+            <a:r>
+              <a:rPr sz="1800" b="1">
+                <a:solidFill>
+                  <a:srgbClr val="FFFFFF"/>
+                </a:solidFill>
+                <a:latin typeface="Calibri"/>
+              </a:rPr>
+              <a:t>AUTONOMOUS  AI  FINANCE  ENGINE</a:t>
+            </a:r>
+          </a:p>
+        </p:txBody>
+      </p:sp>
+      <p:sp>
+        <p:nvSpPr>
+          <p:cNvPr id="34" name="TextBox 33"/>
+          <p:cNvSpPr txBox="1"/>
+          <p:nvPr/>
+        </p:nvSpPr>
+        <p:spPr>
+          <a:xfrm>
+            <a:off x="3154680" y="3703320"/>
+            <a:ext cx="6766560" cy="384048"/>
+          </a:xfrm>
+          <a:prstGeom prst="rect">
+            <a:avLst/>
+          </a:prstGeom>
+          <a:noFill/>
+        </p:spPr>
+        <p:txBody>
+          <a:bodyPr wrap="square" anchor="ctr">
+            <a:spAutoFit/>
+          </a:bodyPr>
+          <a:lstStyle/>
+          <a:p>
+            <a:pPr algn="l">
+              <a:lnSpc>
+                <a:spcPct val="105000"/>
+              </a:lnSpc>
+              <a:spcAft>
+                <a:spcPts val="600"/>
+              </a:spcAft>
+            </a:pPr>
+            <a:r>
+              <a:rPr sz="1200" b="0">
+                <a:solidFill>
+                  <a:srgbClr val="E6F4F1"/>
+                </a:solidFill>
+                <a:latin typeface="Calibri"/>
+              </a:rPr>
+              <a:t>runs repetitive finance processes end-to-end, 24/7</a:t>
+            </a:r>
+          </a:p>
+        </p:txBody>
+      </p:sp>
+      <p:sp>
+        <p:nvSpPr>
+          <p:cNvPr id="35" name="Down Arrow 34"/>
           <p:cNvSpPr/>
           <p:nvPr/>
         </p:nvSpPr>
         <p:spPr>
           <a:xfrm>
-            <a:off x="2651760" y="1463040"/>
-            <a:ext cx="8961120" cy="896112"/>
-          </a:xfrm>
-          <a:prstGeom prst="rect">
+            <a:off x="5806440" y="4187952"/>
+            <a:ext cx="566928" cy="310896"/>
+          </a:xfrm>
+          <a:prstGeom prst="downArrow">
+            <a:avLst/>
+          </a:prstGeom>
+          <a:solidFill>
+            <a:srgbClr val="1F3A5F"/>
+          </a:solidFill>
+          <a:ln>
+            <a:noFill/>
+          </a:ln>
+          <a:effectLst/>
+        </p:spPr>
+        <p:style>
+          <a:lnRef idx="1">
+            <a:schemeClr val="accent1"/>
+          </a:lnRef>
+          <a:fillRef idx="3">
+            <a:schemeClr val="accent1"/>
+          </a:fillRef>
+          <a:effectRef idx="2">
+            <a:schemeClr val="accent1"/>
+          </a:effectRef>
+          <a:fontRef idx="minor">
+            <a:schemeClr val="lt1"/>
+          </a:fontRef>
+        </p:style>
+        <p:txBody>
+          <a:bodyPr rtlCol="0" anchor="ctr"/>
+          <a:lstStyle/>
+          <a:p>
+            <a:pPr algn="ctr"/>
+          </a:p>
+        </p:txBody>
+      </p:sp>
+      <p:sp>
+        <p:nvSpPr>
+          <p:cNvPr id="36" name="TextBox 35"/>
+          <p:cNvSpPr txBox="1"/>
+          <p:nvPr/>
+        </p:nvSpPr>
+        <p:spPr>
+          <a:xfrm>
+            <a:off x="6400800" y="4187952"/>
+            <a:ext cx="1828800" cy="310896"/>
+          </a:xfrm>
+          <a:prstGeom prst="rect">
+            <a:avLst/>
+          </a:prstGeom>
+          <a:noFill/>
+        </p:spPr>
+        <p:txBody>
+          <a:bodyPr wrap="square" anchor="ctr">
+            <a:spAutoFit/>
+          </a:bodyPr>
+          <a:lstStyle/>
+          <a:p>
+            <a:pPr algn="l">
+              <a:lnSpc>
+                <a:spcPct val="105000"/>
+              </a:lnSpc>
+              <a:spcAft>
+                <a:spcPts val="600"/>
+              </a:spcAft>
+            </a:pPr>
+            <a:r>
+              <a:rPr sz="1050" b="1">
+                <a:solidFill>
+                  <a:srgbClr val="1F3A5F"/>
+                </a:solidFill>
+                <a:latin typeface="Calibri"/>
+              </a:rPr>
+              <a:t>executes</a:t>
+            </a:r>
+          </a:p>
+        </p:txBody>
+      </p:sp>
+      <p:sp>
+        <p:nvSpPr>
+          <p:cNvPr id="37" name="Rounded Rectangle 36"/>
+          <p:cNvSpPr/>
+          <p:nvPr/>
+        </p:nvSpPr>
+        <p:spPr>
+          <a:xfrm>
+            <a:off x="640080" y="4553712"/>
+            <a:ext cx="1737360" cy="1188720"/>
+          </a:xfrm>
+          <a:prstGeom prst="roundRect">
             <a:avLst/>
           </a:prstGeom>
           <a:solidFill>
@@ -8691,56 +9801,14 @@
       </p:sp>
       <p:sp>
         <p:nvSpPr>
-          <p:cNvPr id="14" name="TextBox 13"/>
-          <p:cNvSpPr txBox="1"/>
-          <p:nvPr/>
-        </p:nvSpPr>
-        <p:spPr>
-          <a:xfrm>
-            <a:off x="2834640" y="1682496"/>
-            <a:ext cx="8595360" cy="457200"/>
-          </a:xfrm>
-          <a:prstGeom prst="rect">
-            <a:avLst/>
-          </a:prstGeom>
-          <a:noFill/>
-        </p:spPr>
-        <p:txBody>
-          <a:bodyPr wrap="square" anchor="ctr">
-            <a:spAutoFit/>
-          </a:bodyPr>
-          <a:lstStyle/>
-          <a:p>
-            <a:pPr algn="l">
-              <a:lnSpc>
-                <a:spcPct val="105000"/>
-              </a:lnSpc>
-              <a:spcAft>
-                <a:spcPts val="600"/>
-              </a:spcAft>
-            </a:pPr>
-            <a:r>
-              <a:rPr sz="1500" b="0">
-                <a:solidFill>
-                  <a:srgbClr val="33383F"/>
-                </a:solidFill>
-                <a:latin typeface="Calibri"/>
-              </a:rPr>
-              <a:t>Situation assessment + a unified KPI data dictionary (entity-confirmed)</a:t>
-            </a:r>
-          </a:p>
-        </p:txBody>
-      </p:sp>
-      <p:sp>
-        <p:nvSpPr>
-          <p:cNvPr id="15" name="Rectangle 14"/>
+          <p:cNvPr id="38" name="Rectangle 37"/>
           <p:cNvSpPr/>
           <p:nvPr/>
         </p:nvSpPr>
         <p:spPr>
           <a:xfrm>
-            <a:off x="640080" y="2487168"/>
-            <a:ext cx="1828800" cy="896112"/>
+            <a:off x="640080" y="4553712"/>
+            <a:ext cx="1737360" cy="109728"/>
           </a:xfrm>
           <a:prstGeom prst="rect">
             <a:avLst/>
@@ -8777,14 +9845,14 @@
       </p:sp>
       <p:sp>
         <p:nvSpPr>
-          <p:cNvPr id="16" name="TextBox 15"/>
+          <p:cNvPr id="39" name="TextBox 38"/>
           <p:cNvSpPr txBox="1"/>
           <p:nvPr/>
         </p:nvSpPr>
         <p:spPr>
           <a:xfrm>
-            <a:off x="640080" y="2706624"/>
-            <a:ext cx="1828800" cy="457200"/>
+            <a:off x="731520" y="4773168"/>
+            <a:ext cx="1554480" cy="502920"/>
           </a:xfrm>
           <a:prstGeom prst="rect">
             <a:avLst/>
@@ -8799,36 +9867,78 @@
           <a:p>
             <a:pPr algn="ctr">
               <a:lnSpc>
-                <a:spcPct val="105000"/>
+                <a:spcPct val="100000"/>
               </a:lnSpc>
               <a:spcAft>
                 <a:spcPts val="600"/>
               </a:spcAft>
             </a:pPr>
             <a:r>
-              <a:rPr sz="2000" b="1">
-                <a:solidFill>
-                  <a:srgbClr val="FFFFFF"/>
-                </a:solidFill>
-                <a:latin typeface="Calibri"/>
-              </a:rPr>
-              <a:t>60 days</a:t>
-            </a:r>
-          </a:p>
-        </p:txBody>
-      </p:sp>
-      <p:sp>
-        <p:nvSpPr>
-          <p:cNvPr id="17" name="Rectangle 16"/>
+              <a:rPr sz="1150" b="1">
+                <a:solidFill>
+                  <a:srgbClr val="1F3A5F"/>
+                </a:solidFill>
+                <a:latin typeface="Calibri"/>
+              </a:rPr>
+              <a:t>Monthly Close</a:t>
+            </a:r>
+          </a:p>
+        </p:txBody>
+      </p:sp>
+      <p:sp>
+        <p:nvSpPr>
+          <p:cNvPr id="40" name="TextBox 39"/>
+          <p:cNvSpPr txBox="1"/>
+          <p:nvPr/>
+        </p:nvSpPr>
+        <p:spPr>
+          <a:xfrm>
+            <a:off x="731520" y="5212080"/>
+            <a:ext cx="1554480" cy="457200"/>
+          </a:xfrm>
+          <a:prstGeom prst="rect">
+            <a:avLst/>
+          </a:prstGeom>
+          <a:noFill/>
+        </p:spPr>
+        <p:txBody>
+          <a:bodyPr wrap="square" anchor="t">
+            <a:spAutoFit/>
+          </a:bodyPr>
+          <a:lstStyle/>
+          <a:p>
+            <a:pPr algn="ctr">
+              <a:lnSpc>
+                <a:spcPct val="100000"/>
+              </a:lnSpc>
+              <a:spcAft>
+                <a:spcPts val="600"/>
+              </a:spcAft>
+            </a:pPr>
+            <a:r>
+              <a:rPr sz="850" b="0">
+                <a:solidFill>
+                  <a:srgbClr val="5A6B7B"/>
+                </a:solidFill>
+                <a:latin typeface="Calibri"/>
+              </a:rPr>
+              <a:t>auto journals · accruals · consolidation</a:t>
+            </a:r>
+          </a:p>
+        </p:txBody>
+      </p:sp>
+      <p:sp>
+        <p:nvSpPr>
+          <p:cNvPr id="41" name="Rounded Rectangle 40"/>
           <p:cNvSpPr/>
           <p:nvPr/>
         </p:nvSpPr>
         <p:spPr>
           <a:xfrm>
-            <a:off x="2651760" y="2487168"/>
-            <a:ext cx="8961120" cy="896112"/>
-          </a:xfrm>
-          <a:prstGeom prst="rect">
+            <a:off x="2478024" y="4553712"/>
+            <a:ext cx="1737360" cy="1188720"/>
+          </a:xfrm>
+          <a:prstGeom prst="roundRect">
             <a:avLst/>
           </a:prstGeom>
           <a:solidFill>
@@ -8865,62 +9975,20 @@
       </p:sp>
       <p:sp>
         <p:nvSpPr>
-          <p:cNvPr id="18" name="TextBox 17"/>
-          <p:cNvSpPr txBox="1"/>
-          <p:nvPr/>
-        </p:nvSpPr>
-        <p:spPr>
-          <a:xfrm>
-            <a:off x="2834640" y="2706624"/>
-            <a:ext cx="8595360" cy="457200"/>
-          </a:xfrm>
-          <a:prstGeom prst="rect">
-            <a:avLst/>
-          </a:prstGeom>
-          <a:noFill/>
-        </p:spPr>
-        <p:txBody>
-          <a:bodyPr wrap="square" anchor="ctr">
-            <a:spAutoFit/>
-          </a:bodyPr>
-          <a:lstStyle/>
-          <a:p>
-            <a:pPr algn="l">
-              <a:lnSpc>
-                <a:spcPct val="105000"/>
-              </a:lnSpc>
-              <a:spcAft>
-                <a:spcPts val="600"/>
-              </a:spcAft>
-            </a:pPr>
-            <a:r>
-              <a:rPr sz="1500" b="0">
-                <a:solidFill>
-                  <a:srgbClr val="33383F"/>
-                </a:solidFill>
-                <a:latin typeface="Calibri"/>
-              </a:rPr>
-              <a:t>Automate the monthly consolidation; first report Day 4 → Day 2</a:t>
-            </a:r>
-          </a:p>
-        </p:txBody>
-      </p:sp>
-      <p:sp>
-        <p:nvSpPr>
-          <p:cNvPr id="19" name="Rectangle 18"/>
+          <p:cNvPr id="42" name="Rectangle 41"/>
           <p:cNvSpPr/>
           <p:nvPr/>
         </p:nvSpPr>
         <p:spPr>
           <a:xfrm>
-            <a:off x="640080" y="3511296"/>
-            <a:ext cx="1828800" cy="896112"/>
+            <a:off x="2478024" y="4553712"/>
+            <a:ext cx="1737360" cy="109728"/>
           </a:xfrm>
           <a:prstGeom prst="rect">
             <a:avLst/>
           </a:prstGeom>
           <a:solidFill>
-            <a:srgbClr val="178F80"/>
+            <a:srgbClr val="2E6DA4"/>
           </a:solidFill>
           <a:ln>
             <a:noFill/>
@@ -8951,14 +10019,14 @@
       </p:sp>
       <p:sp>
         <p:nvSpPr>
-          <p:cNvPr id="20" name="TextBox 19"/>
+          <p:cNvPr id="43" name="TextBox 42"/>
           <p:cNvSpPr txBox="1"/>
           <p:nvPr/>
         </p:nvSpPr>
         <p:spPr>
           <a:xfrm>
-            <a:off x="640080" y="3730752"/>
-            <a:ext cx="1828800" cy="457200"/>
+            <a:off x="2569464" y="4773168"/>
+            <a:ext cx="1554480" cy="502920"/>
           </a:xfrm>
           <a:prstGeom prst="rect">
             <a:avLst/>
@@ -8973,36 +10041,78 @@
           <a:p>
             <a:pPr algn="ctr">
               <a:lnSpc>
-                <a:spcPct val="105000"/>
+                <a:spcPct val="100000"/>
               </a:lnSpc>
               <a:spcAft>
                 <a:spcPts val="600"/>
               </a:spcAft>
             </a:pPr>
             <a:r>
-              <a:rPr sz="2000" b="1">
-                <a:solidFill>
-                  <a:srgbClr val="FFFFFF"/>
-                </a:solidFill>
-                <a:latin typeface="Calibri"/>
-              </a:rPr>
-              <a:t>90 days</a:t>
-            </a:r>
-          </a:p>
-        </p:txBody>
-      </p:sp>
-      <p:sp>
-        <p:nvSpPr>
-          <p:cNvPr id="21" name="Rectangle 20"/>
+              <a:rPr sz="1150" b="1">
+                <a:solidFill>
+                  <a:srgbClr val="1F3A5F"/>
+                </a:solidFill>
+                <a:latin typeface="Calibri"/>
+              </a:rPr>
+              <a:t>Plan &amp; Forecast</a:t>
+            </a:r>
+          </a:p>
+        </p:txBody>
+      </p:sp>
+      <p:sp>
+        <p:nvSpPr>
+          <p:cNvPr id="44" name="TextBox 43"/>
+          <p:cNvSpPr txBox="1"/>
+          <p:nvPr/>
+        </p:nvSpPr>
+        <p:spPr>
+          <a:xfrm>
+            <a:off x="2569464" y="5212080"/>
+            <a:ext cx="1554480" cy="457200"/>
+          </a:xfrm>
+          <a:prstGeom prst="rect">
+            <a:avLst/>
+          </a:prstGeom>
+          <a:noFill/>
+        </p:spPr>
+        <p:txBody>
+          <a:bodyPr wrap="square" anchor="t">
+            <a:spAutoFit/>
+          </a:bodyPr>
+          <a:lstStyle/>
+          <a:p>
+            <a:pPr algn="ctr">
+              <a:lnSpc>
+                <a:spcPct val="100000"/>
+              </a:lnSpc>
+              <a:spcAft>
+                <a:spcPts val="600"/>
+              </a:spcAft>
+            </a:pPr>
+            <a:r>
+              <a:rPr sz="850" b="0">
+                <a:solidFill>
+                  <a:srgbClr val="5A6B7B"/>
+                </a:solidFill>
+                <a:latin typeface="Calibri"/>
+              </a:rPr>
+              <a:t>driver-based · rolling · scenarios</a:t>
+            </a:r>
+          </a:p>
+        </p:txBody>
+      </p:sp>
+      <p:sp>
+        <p:nvSpPr>
+          <p:cNvPr id="45" name="Rounded Rectangle 44"/>
           <p:cNvSpPr/>
           <p:nvPr/>
         </p:nvSpPr>
         <p:spPr>
           <a:xfrm>
-            <a:off x="2651760" y="3511296"/>
-            <a:ext cx="8961120" cy="896112"/>
-          </a:xfrm>
-          <a:prstGeom prst="rect">
+            <a:off x="4315968" y="4553712"/>
+            <a:ext cx="1737360" cy="1188720"/>
+          </a:xfrm>
+          <a:prstGeom prst="roundRect">
             <a:avLst/>
           </a:prstGeom>
           <a:solidFill>
@@ -9039,56 +10149,14 @@
       </p:sp>
       <p:sp>
         <p:nvSpPr>
-          <p:cNvPr id="22" name="TextBox 21"/>
-          <p:cNvSpPr txBox="1"/>
-          <p:nvPr/>
-        </p:nvSpPr>
-        <p:spPr>
-          <a:xfrm>
-            <a:off x="2834640" y="3730752"/>
-            <a:ext cx="8595360" cy="457200"/>
-          </a:xfrm>
-          <a:prstGeom prst="rect">
-            <a:avLst/>
-          </a:prstGeom>
-          <a:noFill/>
-        </p:spPr>
-        <p:txBody>
-          <a:bodyPr wrap="square" anchor="ctr">
-            <a:spAutoFit/>
-          </a:bodyPr>
-          <a:lstStyle/>
-          <a:p>
-            <a:pPr algn="l">
-              <a:lnSpc>
-                <a:spcPct val="105000"/>
-              </a:lnSpc>
-              <a:spcAft>
-                <a:spcPts val="600"/>
-              </a:spcAft>
-            </a:pPr>
-            <a:r>
-              <a:rPr sz="1500" b="0">
-                <a:solidFill>
-                  <a:srgbClr val="33383F"/>
-                </a:solidFill>
-                <a:latin typeface="Calibri"/>
-              </a:rPr>
-              <a:t>Launch the first self-service management dashboard (single version of truth)</a:t>
-            </a:r>
-          </a:p>
-        </p:txBody>
-      </p:sp>
-      <p:sp>
-        <p:nvSpPr>
-          <p:cNvPr id="23" name="Rectangle 22"/>
+          <p:cNvPr id="46" name="Rectangle 45"/>
           <p:cNvSpPr/>
           <p:nvPr/>
         </p:nvSpPr>
         <p:spPr>
           <a:xfrm>
-            <a:off x="640080" y="4709160"/>
-            <a:ext cx="10972800" cy="1371600"/>
+            <a:off x="4315968" y="4553712"/>
+            <a:ext cx="1737360" cy="109728"/>
           </a:xfrm>
           <a:prstGeom prst="rect">
             <a:avLst/>
@@ -9125,14 +10193,14 @@
       </p:sp>
       <p:sp>
         <p:nvSpPr>
-          <p:cNvPr id="24" name="TextBox 23"/>
+          <p:cNvPr id="47" name="TextBox 46"/>
           <p:cNvSpPr txBox="1"/>
           <p:nvPr/>
         </p:nvSpPr>
         <p:spPr>
           <a:xfrm>
-            <a:off x="868680" y="4882896"/>
-            <a:ext cx="10607040" cy="1051560"/>
+            <a:off x="4407408" y="4773168"/>
+            <a:ext cx="1554480" cy="502920"/>
           </a:xfrm>
           <a:prstGeom prst="rect">
             <a:avLst/>
@@ -9145,41 +10213,681 @@
           </a:bodyPr>
           <a:lstStyle/>
           <a:p>
+            <a:pPr algn="ctr">
+              <a:lnSpc>
+                <a:spcPct val="100000"/>
+              </a:lnSpc>
+              <a:spcAft>
+                <a:spcPts val="600"/>
+              </a:spcAft>
+            </a:pPr>
+            <a:r>
+              <a:rPr sz="1150" b="1">
+                <a:solidFill>
+                  <a:srgbClr val="1F3A5F"/>
+                </a:solidFill>
+                <a:latin typeface="Calibri"/>
+              </a:rPr>
+              <a:t>Expense Accruals</a:t>
+            </a:r>
+          </a:p>
+        </p:txBody>
+      </p:sp>
+      <p:sp>
+        <p:nvSpPr>
+          <p:cNvPr id="48" name="TextBox 47"/>
+          <p:cNvSpPr txBox="1"/>
+          <p:nvPr/>
+        </p:nvSpPr>
+        <p:spPr>
+          <a:xfrm>
+            <a:off x="4407408" y="5212080"/>
+            <a:ext cx="1554480" cy="457200"/>
+          </a:xfrm>
+          <a:prstGeom prst="rect">
+            <a:avLst/>
+          </a:prstGeom>
+          <a:noFill/>
+        </p:spPr>
+        <p:txBody>
+          <a:bodyPr wrap="square" anchor="t">
+            <a:spAutoFit/>
+          </a:bodyPr>
+          <a:lstStyle/>
+          <a:p>
+            <a:pPr algn="ctr">
+              <a:lnSpc>
+                <a:spcPct val="100000"/>
+              </a:lnSpc>
+              <a:spcAft>
+                <a:spcPts val="600"/>
+              </a:spcAft>
+            </a:pPr>
+            <a:r>
+              <a:rPr sz="850" b="0">
+                <a:solidFill>
+                  <a:srgbClr val="5A6B7B"/>
+                </a:solidFill>
+                <a:latin typeface="Calibri"/>
+              </a:rPr>
+              <a:t>rule + ML estimates, auto-posted</a:t>
+            </a:r>
+          </a:p>
+        </p:txBody>
+      </p:sp>
+      <p:sp>
+        <p:nvSpPr>
+          <p:cNvPr id="49" name="Rounded Rectangle 48"/>
+          <p:cNvSpPr/>
+          <p:nvPr/>
+        </p:nvSpPr>
+        <p:spPr>
+          <a:xfrm>
+            <a:off x="6153912" y="4553712"/>
+            <a:ext cx="1737360" cy="1188720"/>
+          </a:xfrm>
+          <a:prstGeom prst="roundRect">
+            <a:avLst/>
+          </a:prstGeom>
+          <a:solidFill>
+            <a:srgbClr val="FFFFFF"/>
+          </a:solidFill>
+          <a:ln w="12700">
+            <a:solidFill>
+              <a:srgbClr val="D9E0E7"/>
+            </a:solidFill>
+          </a:ln>
+          <a:effectLst/>
+        </p:spPr>
+        <p:style>
+          <a:lnRef idx="1">
+            <a:schemeClr val="accent1"/>
+          </a:lnRef>
+          <a:fillRef idx="3">
+            <a:schemeClr val="accent1"/>
+          </a:fillRef>
+          <a:effectRef idx="2">
+            <a:schemeClr val="accent1"/>
+          </a:effectRef>
+          <a:fontRef idx="minor">
+            <a:schemeClr val="lt1"/>
+          </a:fontRef>
+        </p:style>
+        <p:txBody>
+          <a:bodyPr rtlCol="0" anchor="ctr"/>
+          <a:lstStyle/>
+          <a:p>
+            <a:pPr algn="ctr"/>
+          </a:p>
+        </p:txBody>
+      </p:sp>
+      <p:sp>
+        <p:nvSpPr>
+          <p:cNvPr id="50" name="Rectangle 49"/>
+          <p:cNvSpPr/>
+          <p:nvPr/>
+        </p:nvSpPr>
+        <p:spPr>
+          <a:xfrm>
+            <a:off x="6153912" y="4553712"/>
+            <a:ext cx="1737360" cy="109728"/>
+          </a:xfrm>
+          <a:prstGeom prst="rect">
+            <a:avLst/>
+          </a:prstGeom>
+          <a:solidFill>
+            <a:srgbClr val="178F80"/>
+          </a:solidFill>
+          <a:ln>
+            <a:noFill/>
+          </a:ln>
+          <a:effectLst/>
+        </p:spPr>
+        <p:style>
+          <a:lnRef idx="1">
+            <a:schemeClr val="accent1"/>
+          </a:lnRef>
+          <a:fillRef idx="3">
+            <a:schemeClr val="accent1"/>
+          </a:fillRef>
+          <a:effectRef idx="2">
+            <a:schemeClr val="accent1"/>
+          </a:effectRef>
+          <a:fontRef idx="minor">
+            <a:schemeClr val="lt1"/>
+          </a:fontRef>
+        </p:style>
+        <p:txBody>
+          <a:bodyPr rtlCol="0" anchor="ctr"/>
+          <a:lstStyle/>
+          <a:p>
+            <a:pPr algn="ctr"/>
+          </a:p>
+        </p:txBody>
+      </p:sp>
+      <p:sp>
+        <p:nvSpPr>
+          <p:cNvPr id="51" name="TextBox 50"/>
+          <p:cNvSpPr txBox="1"/>
+          <p:nvPr/>
+        </p:nvSpPr>
+        <p:spPr>
+          <a:xfrm>
+            <a:off x="6245352" y="4773168"/>
+            <a:ext cx="1554480" cy="502920"/>
+          </a:xfrm>
+          <a:prstGeom prst="rect">
+            <a:avLst/>
+          </a:prstGeom>
+          <a:noFill/>
+        </p:spPr>
+        <p:txBody>
+          <a:bodyPr wrap="square" anchor="t">
+            <a:spAutoFit/>
+          </a:bodyPr>
+          <a:lstStyle/>
+          <a:p>
+            <a:pPr algn="ctr">
+              <a:lnSpc>
+                <a:spcPct val="100000"/>
+              </a:lnSpc>
+              <a:spcAft>
+                <a:spcPts val="600"/>
+              </a:spcAft>
+            </a:pPr>
+            <a:r>
+              <a:rPr sz="1150" b="1">
+                <a:solidFill>
+                  <a:srgbClr val="1F3A5F"/>
+                </a:solidFill>
+                <a:latin typeface="Calibri"/>
+              </a:rPr>
+              <a:t>Reconciliations</a:t>
+            </a:r>
+          </a:p>
+        </p:txBody>
+      </p:sp>
+      <p:sp>
+        <p:nvSpPr>
+          <p:cNvPr id="52" name="TextBox 51"/>
+          <p:cNvSpPr txBox="1"/>
+          <p:nvPr/>
+        </p:nvSpPr>
+        <p:spPr>
+          <a:xfrm>
+            <a:off x="6245352" y="5212080"/>
+            <a:ext cx="1554480" cy="457200"/>
+          </a:xfrm>
+          <a:prstGeom prst="rect">
+            <a:avLst/>
+          </a:prstGeom>
+          <a:noFill/>
+        </p:spPr>
+        <p:txBody>
+          <a:bodyPr wrap="square" anchor="t">
+            <a:spAutoFit/>
+          </a:bodyPr>
+          <a:lstStyle/>
+          <a:p>
+            <a:pPr algn="ctr">
+              <a:lnSpc>
+                <a:spcPct val="100000"/>
+              </a:lnSpc>
+              <a:spcAft>
+                <a:spcPts val="600"/>
+              </a:spcAft>
+            </a:pPr>
+            <a:r>
+              <a:rPr sz="850" b="0">
+                <a:solidFill>
+                  <a:srgbClr val="5A6B7B"/>
+                </a:solidFill>
+                <a:latin typeface="Calibri"/>
+              </a:rPr>
+              <a:t>auto-match · flag &amp; explain breaks</a:t>
+            </a:r>
+          </a:p>
+        </p:txBody>
+      </p:sp>
+      <p:sp>
+        <p:nvSpPr>
+          <p:cNvPr id="53" name="Rounded Rectangle 52"/>
+          <p:cNvSpPr/>
+          <p:nvPr/>
+        </p:nvSpPr>
+        <p:spPr>
+          <a:xfrm>
+            <a:off x="7991856" y="4553712"/>
+            <a:ext cx="1737360" cy="1188720"/>
+          </a:xfrm>
+          <a:prstGeom prst="roundRect">
+            <a:avLst/>
+          </a:prstGeom>
+          <a:solidFill>
+            <a:srgbClr val="FFFFFF"/>
+          </a:solidFill>
+          <a:ln w="12700">
+            <a:solidFill>
+              <a:srgbClr val="D9E0E7"/>
+            </a:solidFill>
+          </a:ln>
+          <a:effectLst/>
+        </p:spPr>
+        <p:style>
+          <a:lnRef idx="1">
+            <a:schemeClr val="accent1"/>
+          </a:lnRef>
+          <a:fillRef idx="3">
+            <a:schemeClr val="accent1"/>
+          </a:fillRef>
+          <a:effectRef idx="2">
+            <a:schemeClr val="accent1"/>
+          </a:effectRef>
+          <a:fontRef idx="minor">
+            <a:schemeClr val="lt1"/>
+          </a:fontRef>
+        </p:style>
+        <p:txBody>
+          <a:bodyPr rtlCol="0" anchor="ctr"/>
+          <a:lstStyle/>
+          <a:p>
+            <a:pPr algn="ctr"/>
+          </a:p>
+        </p:txBody>
+      </p:sp>
+      <p:sp>
+        <p:nvSpPr>
+          <p:cNvPr id="54" name="Rectangle 53"/>
+          <p:cNvSpPr/>
+          <p:nvPr/>
+        </p:nvSpPr>
+        <p:spPr>
+          <a:xfrm>
+            <a:off x="7991856" y="4553712"/>
+            <a:ext cx="1737360" cy="109728"/>
+          </a:xfrm>
+          <a:prstGeom prst="rect">
+            <a:avLst/>
+          </a:prstGeom>
+          <a:solidFill>
+            <a:srgbClr val="2E6DA4"/>
+          </a:solidFill>
+          <a:ln>
+            <a:noFill/>
+          </a:ln>
+          <a:effectLst/>
+        </p:spPr>
+        <p:style>
+          <a:lnRef idx="1">
+            <a:schemeClr val="accent1"/>
+          </a:lnRef>
+          <a:fillRef idx="3">
+            <a:schemeClr val="accent1"/>
+          </a:fillRef>
+          <a:effectRef idx="2">
+            <a:schemeClr val="accent1"/>
+          </a:effectRef>
+          <a:fontRef idx="minor">
+            <a:schemeClr val="lt1"/>
+          </a:fontRef>
+        </p:style>
+        <p:txBody>
+          <a:bodyPr rtlCol="0" anchor="ctr"/>
+          <a:lstStyle/>
+          <a:p>
+            <a:pPr algn="ctr"/>
+          </a:p>
+        </p:txBody>
+      </p:sp>
+      <p:sp>
+        <p:nvSpPr>
+          <p:cNvPr id="55" name="TextBox 54"/>
+          <p:cNvSpPr txBox="1"/>
+          <p:nvPr/>
+        </p:nvSpPr>
+        <p:spPr>
+          <a:xfrm>
+            <a:off x="8083296" y="4773168"/>
+            <a:ext cx="1554480" cy="502920"/>
+          </a:xfrm>
+          <a:prstGeom prst="rect">
+            <a:avLst/>
+          </a:prstGeom>
+          <a:noFill/>
+        </p:spPr>
+        <p:txBody>
+          <a:bodyPr wrap="square" anchor="t">
+            <a:spAutoFit/>
+          </a:bodyPr>
+          <a:lstStyle/>
+          <a:p>
+            <a:pPr algn="ctr">
+              <a:lnSpc>
+                <a:spcPct val="100000"/>
+              </a:lnSpc>
+              <a:spcAft>
+                <a:spcPts val="600"/>
+              </a:spcAft>
+            </a:pPr>
+            <a:r>
+              <a:rPr sz="1150" b="1">
+                <a:solidFill>
+                  <a:srgbClr val="1F3A5F"/>
+                </a:solidFill>
+                <a:latin typeface="Calibri"/>
+              </a:rPr>
+              <a:t>Mgmt Reporting</a:t>
+            </a:r>
+          </a:p>
+        </p:txBody>
+      </p:sp>
+      <p:sp>
+        <p:nvSpPr>
+          <p:cNvPr id="56" name="TextBox 55"/>
+          <p:cNvSpPr txBox="1"/>
+          <p:nvPr/>
+        </p:nvSpPr>
+        <p:spPr>
+          <a:xfrm>
+            <a:off x="8083296" y="5212080"/>
+            <a:ext cx="1554480" cy="457200"/>
+          </a:xfrm>
+          <a:prstGeom prst="rect">
+            <a:avLst/>
+          </a:prstGeom>
+          <a:noFill/>
+        </p:spPr>
+        <p:txBody>
+          <a:bodyPr wrap="square" anchor="t">
+            <a:spAutoFit/>
+          </a:bodyPr>
+          <a:lstStyle/>
+          <a:p>
+            <a:pPr algn="ctr">
+              <a:lnSpc>
+                <a:spcPct val="100000"/>
+              </a:lnSpc>
+              <a:spcAft>
+                <a:spcPts val="600"/>
+              </a:spcAft>
+            </a:pPr>
+            <a:r>
+              <a:rPr sz="850" b="0">
+                <a:solidFill>
+                  <a:srgbClr val="5A6B7B"/>
+                </a:solidFill>
+                <a:latin typeface="Calibri"/>
+              </a:rPr>
+              <a:t>auto-generated &amp; narrated</a:t>
+            </a:r>
+          </a:p>
+        </p:txBody>
+      </p:sp>
+      <p:sp>
+        <p:nvSpPr>
+          <p:cNvPr id="57" name="Rounded Rectangle 56"/>
+          <p:cNvSpPr/>
+          <p:nvPr/>
+        </p:nvSpPr>
+        <p:spPr>
+          <a:xfrm>
+            <a:off x="9829800" y="4553712"/>
+            <a:ext cx="1737360" cy="1188720"/>
+          </a:xfrm>
+          <a:prstGeom prst="roundRect">
+            <a:avLst/>
+          </a:prstGeom>
+          <a:solidFill>
+            <a:srgbClr val="FFFFFF"/>
+          </a:solidFill>
+          <a:ln w="12700">
+            <a:solidFill>
+              <a:srgbClr val="D9E0E7"/>
+            </a:solidFill>
+          </a:ln>
+          <a:effectLst/>
+        </p:spPr>
+        <p:style>
+          <a:lnRef idx="1">
+            <a:schemeClr val="accent1"/>
+          </a:lnRef>
+          <a:fillRef idx="3">
+            <a:schemeClr val="accent1"/>
+          </a:fillRef>
+          <a:effectRef idx="2">
+            <a:schemeClr val="accent1"/>
+          </a:effectRef>
+          <a:fontRef idx="minor">
+            <a:schemeClr val="lt1"/>
+          </a:fontRef>
+        </p:style>
+        <p:txBody>
+          <a:bodyPr rtlCol="0" anchor="ctr"/>
+          <a:lstStyle/>
+          <a:p>
+            <a:pPr algn="ctr"/>
+          </a:p>
+        </p:txBody>
+      </p:sp>
+      <p:sp>
+        <p:nvSpPr>
+          <p:cNvPr id="58" name="Rectangle 57"/>
+          <p:cNvSpPr/>
+          <p:nvPr/>
+        </p:nvSpPr>
+        <p:spPr>
+          <a:xfrm>
+            <a:off x="9829800" y="4553712"/>
+            <a:ext cx="1737360" cy="109728"/>
+          </a:xfrm>
+          <a:prstGeom prst="rect">
+            <a:avLst/>
+          </a:prstGeom>
+          <a:solidFill>
+            <a:srgbClr val="1F3A5F"/>
+          </a:solidFill>
+          <a:ln>
+            <a:noFill/>
+          </a:ln>
+          <a:effectLst/>
+        </p:spPr>
+        <p:style>
+          <a:lnRef idx="1">
+            <a:schemeClr val="accent1"/>
+          </a:lnRef>
+          <a:fillRef idx="3">
+            <a:schemeClr val="accent1"/>
+          </a:fillRef>
+          <a:effectRef idx="2">
+            <a:schemeClr val="accent1"/>
+          </a:effectRef>
+          <a:fontRef idx="minor">
+            <a:schemeClr val="lt1"/>
+          </a:fontRef>
+        </p:style>
+        <p:txBody>
+          <a:bodyPr rtlCol="0" anchor="ctr"/>
+          <a:lstStyle/>
+          <a:p>
+            <a:pPr algn="ctr"/>
+          </a:p>
+        </p:txBody>
+      </p:sp>
+      <p:sp>
+        <p:nvSpPr>
+          <p:cNvPr id="59" name="TextBox 58"/>
+          <p:cNvSpPr txBox="1"/>
+          <p:nvPr/>
+        </p:nvSpPr>
+        <p:spPr>
+          <a:xfrm>
+            <a:off x="9921240" y="4773168"/>
+            <a:ext cx="1554480" cy="502920"/>
+          </a:xfrm>
+          <a:prstGeom prst="rect">
+            <a:avLst/>
+          </a:prstGeom>
+          <a:noFill/>
+        </p:spPr>
+        <p:txBody>
+          <a:bodyPr wrap="square" anchor="t">
+            <a:spAutoFit/>
+          </a:bodyPr>
+          <a:lstStyle/>
+          <a:p>
+            <a:pPr algn="ctr">
+              <a:lnSpc>
+                <a:spcPct val="100000"/>
+              </a:lnSpc>
+              <a:spcAft>
+                <a:spcPts val="600"/>
+              </a:spcAft>
+            </a:pPr>
+            <a:r>
+              <a:rPr sz="1150" b="1">
+                <a:solidFill>
+                  <a:srgbClr val="1F3A5F"/>
+                </a:solidFill>
+                <a:latin typeface="Calibri"/>
+              </a:rPr>
+              <a:t>Anomaly &amp; Controls</a:t>
+            </a:r>
+          </a:p>
+        </p:txBody>
+      </p:sp>
+      <p:sp>
+        <p:nvSpPr>
+          <p:cNvPr id="60" name="TextBox 59"/>
+          <p:cNvSpPr txBox="1"/>
+          <p:nvPr/>
+        </p:nvSpPr>
+        <p:spPr>
+          <a:xfrm>
+            <a:off x="9921240" y="5212080"/>
+            <a:ext cx="1554480" cy="457200"/>
+          </a:xfrm>
+          <a:prstGeom prst="rect">
+            <a:avLst/>
+          </a:prstGeom>
+          <a:noFill/>
+        </p:spPr>
+        <p:txBody>
+          <a:bodyPr wrap="square" anchor="t">
+            <a:spAutoFit/>
+          </a:bodyPr>
+          <a:lstStyle/>
+          <a:p>
+            <a:pPr algn="ctr">
+              <a:lnSpc>
+                <a:spcPct val="100000"/>
+              </a:lnSpc>
+              <a:spcAft>
+                <a:spcPts val="600"/>
+              </a:spcAft>
+            </a:pPr>
+            <a:r>
+              <a:rPr sz="850" b="0">
+                <a:solidFill>
+                  <a:srgbClr val="5A6B7B"/>
+                </a:solidFill>
+                <a:latin typeface="Calibri"/>
+              </a:rPr>
+              <a:t>continuous, real-time checks</a:t>
+            </a:r>
+          </a:p>
+        </p:txBody>
+      </p:sp>
+      <p:sp>
+        <p:nvSpPr>
+          <p:cNvPr id="61" name="Rectangle 60"/>
+          <p:cNvSpPr/>
+          <p:nvPr/>
+        </p:nvSpPr>
+        <p:spPr>
+          <a:xfrm>
+            <a:off x="640080" y="5870448"/>
+            <a:ext cx="10908792" cy="420624"/>
+          </a:xfrm>
+          <a:prstGeom prst="rect">
+            <a:avLst/>
+          </a:prstGeom>
+          <a:solidFill>
+            <a:srgbClr val="1F3A5F"/>
+          </a:solidFill>
+          <a:ln>
+            <a:noFill/>
+          </a:ln>
+          <a:effectLst/>
+        </p:spPr>
+        <p:style>
+          <a:lnRef idx="1">
+            <a:schemeClr val="accent1"/>
+          </a:lnRef>
+          <a:fillRef idx="3">
+            <a:schemeClr val="accent1"/>
+          </a:fillRef>
+          <a:effectRef idx="2">
+            <a:schemeClr val="accent1"/>
+          </a:effectRef>
+          <a:fontRef idx="minor">
+            <a:schemeClr val="lt1"/>
+          </a:fontRef>
+        </p:style>
+        <p:txBody>
+          <a:bodyPr rtlCol="0" anchor="ctr"/>
+          <a:lstStyle/>
+          <a:p>
+            <a:pPr algn="ctr"/>
+          </a:p>
+        </p:txBody>
+      </p:sp>
+      <p:sp>
+        <p:nvSpPr>
+          <p:cNvPr id="62" name="TextBox 61"/>
+          <p:cNvSpPr txBox="1"/>
+          <p:nvPr/>
+        </p:nvSpPr>
+        <p:spPr>
+          <a:xfrm>
+            <a:off x="822960" y="5925312"/>
+            <a:ext cx="10515600" cy="310896"/>
+          </a:xfrm>
+          <a:prstGeom prst="rect">
+            <a:avLst/>
+          </a:prstGeom>
+          <a:noFill/>
+        </p:spPr>
+        <p:txBody>
+          <a:bodyPr wrap="square" anchor="ctr">
+            <a:spAutoFit/>
+          </a:bodyPr>
+          <a:lstStyle/>
+          <a:p>
             <a:pPr algn="l">
               <a:lnSpc>
-                <a:spcPct val="125000"/>
-              </a:lnSpc>
-              <a:spcAft>
-                <a:spcPts val="800"/>
-              </a:spcAft>
-            </a:pPr>
-            <a:r>
-              <a:rPr sz="1500" b="1">
+                <a:spcPct val="105000"/>
+              </a:lnSpc>
+              <a:spcAft>
+                <a:spcPts val="600"/>
+              </a:spcAft>
+            </a:pPr>
+            <a:r>
+              <a:rPr sz="1200" b="1">
                 <a:solidFill>
                   <a:srgbClr val="C8A24B"/>
                 </a:solidFill>
                 <a:latin typeface="Calibri"/>
               </a:rPr>
-              <a:t>THE ASK</a:t>
-            </a:r>
-          </a:p>
-          <a:p>
-            <a:pPr algn="l">
-              <a:lnSpc>
-                <a:spcPct val="125000"/>
-              </a:lnSpc>
-              <a:spcAft>
-                <a:spcPts val="800"/>
-              </a:spcAft>
-            </a:pPr>
-            <a:r>
-              <a:rPr sz="1800" b="1">
+              <a:t>The shift:  </a:t>
+            </a:r>
+            <a:r>
+              <a:rPr sz="1200" b="1">
                 <a:solidFill>
                   <a:srgbClr val="FFFFFF"/>
                 </a:solidFill>
                 <a:latin typeface="Calibri"/>
               </a:rPr>
-              <a:t>Please authorize me to lead the KPI alignment and nominate one data contact per entity.</a:t>
+              <a:t>from doing the work  →  to designing, governing and continuously improving the system that does it.</a:t>
             </a:r>
           </a:p>
         </p:txBody>
@@ -9217,6 +10925,1037 @@
             <a:avLst/>
           </a:prstGeom>
           <a:solidFill>
+            <a:srgbClr val="FBFCFD"/>
+          </a:solidFill>
+          <a:ln>
+            <a:noFill/>
+          </a:ln>
+          <a:effectLst/>
+        </p:spPr>
+        <p:style>
+          <a:lnRef idx="1">
+            <a:schemeClr val="accent1"/>
+          </a:lnRef>
+          <a:fillRef idx="3">
+            <a:schemeClr val="accent1"/>
+          </a:fillRef>
+          <a:effectRef idx="2">
+            <a:schemeClr val="accent1"/>
+          </a:effectRef>
+          <a:fontRef idx="minor">
+            <a:schemeClr val="lt1"/>
+          </a:fontRef>
+        </p:style>
+        <p:txBody>
+          <a:bodyPr rtlCol="0" anchor="ctr"/>
+          <a:lstStyle/>
+          <a:p>
+            <a:pPr algn="ctr"/>
+          </a:p>
+        </p:txBody>
+      </p:sp>
+      <p:sp>
+        <p:nvSpPr>
+          <p:cNvPr id="3" name="Rectangle 2"/>
+          <p:cNvSpPr/>
+          <p:nvPr/>
+        </p:nvSpPr>
+        <p:spPr>
+          <a:xfrm>
+            <a:off x="0" y="0"/>
+            <a:ext cx="12191695" cy="1024128"/>
+          </a:xfrm>
+          <a:prstGeom prst="rect">
+            <a:avLst/>
+          </a:prstGeom>
+          <a:solidFill>
+            <a:srgbClr val="1F3A5F"/>
+          </a:solidFill>
+          <a:ln>
+            <a:noFill/>
+          </a:ln>
+          <a:effectLst/>
+        </p:spPr>
+        <p:style>
+          <a:lnRef idx="1">
+            <a:schemeClr val="accent1"/>
+          </a:lnRef>
+          <a:fillRef idx="3">
+            <a:schemeClr val="accent1"/>
+          </a:fillRef>
+          <a:effectRef idx="2">
+            <a:schemeClr val="accent1"/>
+          </a:effectRef>
+          <a:fontRef idx="minor">
+            <a:schemeClr val="lt1"/>
+          </a:fontRef>
+        </p:style>
+        <p:txBody>
+          <a:bodyPr rtlCol="0" anchor="ctr"/>
+          <a:lstStyle/>
+          <a:p>
+            <a:pPr algn="ctr"/>
+          </a:p>
+        </p:txBody>
+      </p:sp>
+      <p:sp>
+        <p:nvSpPr>
+          <p:cNvPr id="4" name="Rectangle 3"/>
+          <p:cNvSpPr/>
+          <p:nvPr/>
+        </p:nvSpPr>
+        <p:spPr>
+          <a:xfrm>
+            <a:off x="0" y="1024128"/>
+            <a:ext cx="12191695" cy="31750"/>
+          </a:xfrm>
+          <a:prstGeom prst="rect">
+            <a:avLst/>
+          </a:prstGeom>
+          <a:solidFill>
+            <a:srgbClr val="C8A24B"/>
+          </a:solidFill>
+          <a:ln>
+            <a:noFill/>
+          </a:ln>
+          <a:effectLst/>
+        </p:spPr>
+        <p:style>
+          <a:lnRef idx="1">
+            <a:schemeClr val="accent1"/>
+          </a:lnRef>
+          <a:fillRef idx="3">
+            <a:schemeClr val="accent1"/>
+          </a:fillRef>
+          <a:effectRef idx="2">
+            <a:schemeClr val="accent1"/>
+          </a:effectRef>
+          <a:fontRef idx="minor">
+            <a:schemeClr val="lt1"/>
+          </a:fontRef>
+        </p:style>
+        <p:txBody>
+          <a:bodyPr rtlCol="0" anchor="ctr"/>
+          <a:lstStyle/>
+          <a:p>
+            <a:pPr algn="ctr"/>
+          </a:p>
+        </p:txBody>
+      </p:sp>
+      <p:sp>
+        <p:nvSpPr>
+          <p:cNvPr id="5" name="TextBox 4"/>
+          <p:cNvSpPr txBox="1"/>
+          <p:nvPr/>
+        </p:nvSpPr>
+        <p:spPr>
+          <a:xfrm>
+            <a:off x="548640" y="146304"/>
+            <a:ext cx="10789920" cy="274320"/>
+          </a:xfrm>
+          <a:prstGeom prst="rect">
+            <a:avLst/>
+          </a:prstGeom>
+          <a:noFill/>
+        </p:spPr>
+        <p:txBody>
+          <a:bodyPr wrap="square" anchor="t">
+            <a:spAutoFit/>
+          </a:bodyPr>
+          <a:lstStyle/>
+          <a:p>
+            <a:pPr algn="l">
+              <a:lnSpc>
+                <a:spcPct val="105000"/>
+              </a:lnSpc>
+              <a:spcAft>
+                <a:spcPts val="600"/>
+              </a:spcAft>
+            </a:pPr>
+            <a:r>
+              <a:rPr sz="1100" b="1">
+                <a:solidFill>
+                  <a:srgbClr val="C8A24B"/>
+                </a:solidFill>
+                <a:latin typeface="Calibri"/>
+              </a:rPr>
+              <a:t>13 · FIRST 90 DAYS</a:t>
+            </a:r>
+          </a:p>
+        </p:txBody>
+      </p:sp>
+      <p:sp>
+        <p:nvSpPr>
+          <p:cNvPr id="6" name="TextBox 5"/>
+          <p:cNvSpPr txBox="1"/>
+          <p:nvPr/>
+        </p:nvSpPr>
+        <p:spPr>
+          <a:xfrm>
+            <a:off x="548640" y="402336"/>
+            <a:ext cx="11064240" cy="566928"/>
+          </a:xfrm>
+          <a:prstGeom prst="rect">
+            <a:avLst/>
+          </a:prstGeom>
+          <a:noFill/>
+        </p:spPr>
+        <p:txBody>
+          <a:bodyPr wrap="square" anchor="ctr">
+            <a:spAutoFit/>
+          </a:bodyPr>
+          <a:lstStyle/>
+          <a:p>
+            <a:pPr algn="l">
+              <a:lnSpc>
+                <a:spcPct val="105000"/>
+              </a:lnSpc>
+              <a:spcAft>
+                <a:spcPts val="600"/>
+              </a:spcAft>
+            </a:pPr>
+            <a:r>
+              <a:rPr sz="2500" b="0">
+                <a:solidFill>
+                  <a:srgbClr val="FFFFFF"/>
+                </a:solidFill>
+                <a:latin typeface="Calibri Light"/>
+              </a:rPr>
+              <a:t>90-day commitment + the ask</a:t>
+            </a:r>
+          </a:p>
+        </p:txBody>
+      </p:sp>
+      <p:sp>
+        <p:nvSpPr>
+          <p:cNvPr id="7" name="Rectangle 6"/>
+          <p:cNvSpPr/>
+          <p:nvPr/>
+        </p:nvSpPr>
+        <p:spPr>
+          <a:xfrm>
+            <a:off x="548640" y="6419088"/>
+            <a:ext cx="11091672" cy="9525"/>
+          </a:xfrm>
+          <a:prstGeom prst="rect">
+            <a:avLst/>
+          </a:prstGeom>
+          <a:solidFill>
+            <a:srgbClr val="D9E0E7"/>
+          </a:solidFill>
+          <a:ln>
+            <a:noFill/>
+          </a:ln>
+          <a:effectLst/>
+        </p:spPr>
+        <p:style>
+          <a:lnRef idx="1">
+            <a:schemeClr val="accent1"/>
+          </a:lnRef>
+          <a:fillRef idx="3">
+            <a:schemeClr val="accent1"/>
+          </a:fillRef>
+          <a:effectRef idx="2">
+            <a:schemeClr val="accent1"/>
+          </a:effectRef>
+          <a:fontRef idx="minor">
+            <a:schemeClr val="lt1"/>
+          </a:fontRef>
+        </p:style>
+        <p:txBody>
+          <a:bodyPr rtlCol="0" anchor="ctr"/>
+          <a:lstStyle/>
+          <a:p>
+            <a:pPr algn="ctr"/>
+          </a:p>
+        </p:txBody>
+      </p:sp>
+      <p:sp>
+        <p:nvSpPr>
+          <p:cNvPr id="8" name="TextBox 7"/>
+          <p:cNvSpPr txBox="1"/>
+          <p:nvPr/>
+        </p:nvSpPr>
+        <p:spPr>
+          <a:xfrm>
+            <a:off x="548640" y="6473952"/>
+            <a:ext cx="4572000" cy="292608"/>
+          </a:xfrm>
+          <a:prstGeom prst="rect">
+            <a:avLst/>
+          </a:prstGeom>
+          <a:noFill/>
+        </p:spPr>
+        <p:txBody>
+          <a:bodyPr wrap="square" anchor="t">
+            <a:spAutoFit/>
+          </a:bodyPr>
+          <a:lstStyle/>
+          <a:p>
+            <a:pPr algn="l">
+              <a:lnSpc>
+                <a:spcPct val="105000"/>
+              </a:lnSpc>
+              <a:spcAft>
+                <a:spcPts val="600"/>
+              </a:spcAft>
+            </a:pPr>
+            <a:r>
+              <a:rPr sz="900" b="0">
+                <a:solidFill>
+                  <a:srgbClr val="5A6B7B"/>
+                </a:solidFill>
+                <a:latin typeface="Calibri"/>
+              </a:rPr>
+              <a:t>Finance &amp; Controlling Transformation</a:t>
+            </a:r>
+          </a:p>
+        </p:txBody>
+      </p:sp>
+      <p:sp>
+        <p:nvSpPr>
+          <p:cNvPr id="9" name="TextBox 8"/>
+          <p:cNvSpPr txBox="1"/>
+          <p:nvPr/>
+        </p:nvSpPr>
+        <p:spPr>
+          <a:xfrm>
+            <a:off x="3657600" y="6473952"/>
+            <a:ext cx="4873752" cy="292608"/>
+          </a:xfrm>
+          <a:prstGeom prst="rect">
+            <a:avLst/>
+          </a:prstGeom>
+          <a:noFill/>
+        </p:spPr>
+        <p:txBody>
+          <a:bodyPr wrap="square" anchor="t">
+            <a:spAutoFit/>
+          </a:bodyPr>
+          <a:lstStyle/>
+          <a:p>
+            <a:pPr algn="ctr">
+              <a:lnSpc>
+                <a:spcPct val="105000"/>
+              </a:lnSpc>
+              <a:spcAft>
+                <a:spcPts val="600"/>
+              </a:spcAft>
+            </a:pPr>
+            <a:r>
+              <a:rPr sz="900" b="0">
+                <a:solidFill>
+                  <a:srgbClr val="5A6B7B"/>
+                </a:solidFill>
+                <a:latin typeface="Calibri"/>
+              </a:rPr>
+              <a:t>Confidential  ·  Prepared for the CFO</a:t>
+            </a:r>
+          </a:p>
+        </p:txBody>
+      </p:sp>
+      <p:sp>
+        <p:nvSpPr>
+          <p:cNvPr id="10" name="TextBox 9"/>
+          <p:cNvSpPr txBox="1"/>
+          <p:nvPr/>
+        </p:nvSpPr>
+        <p:spPr>
+          <a:xfrm>
+            <a:off x="10424160" y="6473952"/>
+            <a:ext cx="1216152" cy="292608"/>
+          </a:xfrm>
+          <a:prstGeom prst="rect">
+            <a:avLst/>
+          </a:prstGeom>
+          <a:noFill/>
+        </p:spPr>
+        <p:txBody>
+          <a:bodyPr wrap="square" anchor="t">
+            <a:spAutoFit/>
+          </a:bodyPr>
+          <a:lstStyle/>
+          <a:p>
+            <a:pPr algn="r">
+              <a:lnSpc>
+                <a:spcPct val="105000"/>
+              </a:lnSpc>
+              <a:spcAft>
+                <a:spcPts val="600"/>
+              </a:spcAft>
+            </a:pPr>
+            <a:r>
+              <a:rPr sz="900" b="1">
+                <a:solidFill>
+                  <a:srgbClr val="5A6B7B"/>
+                </a:solidFill>
+                <a:latin typeface="Calibri"/>
+              </a:rPr>
+              <a:t>15</a:t>
+            </a:r>
+          </a:p>
+        </p:txBody>
+      </p:sp>
+      <p:sp>
+        <p:nvSpPr>
+          <p:cNvPr id="11" name="Rectangle 10"/>
+          <p:cNvSpPr/>
+          <p:nvPr/>
+        </p:nvSpPr>
+        <p:spPr>
+          <a:xfrm>
+            <a:off x="640080" y="1463040"/>
+            <a:ext cx="1828800" cy="896112"/>
+          </a:xfrm>
+          <a:prstGeom prst="rect">
+            <a:avLst/>
+          </a:prstGeom>
+          <a:solidFill>
+            <a:srgbClr val="178F80"/>
+          </a:solidFill>
+          <a:ln>
+            <a:noFill/>
+          </a:ln>
+          <a:effectLst/>
+        </p:spPr>
+        <p:style>
+          <a:lnRef idx="1">
+            <a:schemeClr val="accent1"/>
+          </a:lnRef>
+          <a:fillRef idx="3">
+            <a:schemeClr val="accent1"/>
+          </a:fillRef>
+          <a:effectRef idx="2">
+            <a:schemeClr val="accent1"/>
+          </a:effectRef>
+          <a:fontRef idx="minor">
+            <a:schemeClr val="lt1"/>
+          </a:fontRef>
+        </p:style>
+        <p:txBody>
+          <a:bodyPr rtlCol="0" anchor="ctr"/>
+          <a:lstStyle/>
+          <a:p>
+            <a:pPr algn="ctr"/>
+          </a:p>
+        </p:txBody>
+      </p:sp>
+      <p:sp>
+        <p:nvSpPr>
+          <p:cNvPr id="12" name="TextBox 11"/>
+          <p:cNvSpPr txBox="1"/>
+          <p:nvPr/>
+        </p:nvSpPr>
+        <p:spPr>
+          <a:xfrm>
+            <a:off x="640080" y="1682496"/>
+            <a:ext cx="1828800" cy="457200"/>
+          </a:xfrm>
+          <a:prstGeom prst="rect">
+            <a:avLst/>
+          </a:prstGeom>
+          <a:noFill/>
+        </p:spPr>
+        <p:txBody>
+          <a:bodyPr wrap="square" anchor="t">
+            <a:spAutoFit/>
+          </a:bodyPr>
+          <a:lstStyle/>
+          <a:p>
+            <a:pPr algn="ctr">
+              <a:lnSpc>
+                <a:spcPct val="105000"/>
+              </a:lnSpc>
+              <a:spcAft>
+                <a:spcPts val="600"/>
+              </a:spcAft>
+            </a:pPr>
+            <a:r>
+              <a:rPr sz="2000" b="1">
+                <a:solidFill>
+                  <a:srgbClr val="FFFFFF"/>
+                </a:solidFill>
+                <a:latin typeface="Calibri"/>
+              </a:rPr>
+              <a:t>30 days</a:t>
+            </a:r>
+          </a:p>
+        </p:txBody>
+      </p:sp>
+      <p:sp>
+        <p:nvSpPr>
+          <p:cNvPr id="13" name="Rectangle 12"/>
+          <p:cNvSpPr/>
+          <p:nvPr/>
+        </p:nvSpPr>
+        <p:spPr>
+          <a:xfrm>
+            <a:off x="2651760" y="1463040"/>
+            <a:ext cx="8961120" cy="896112"/>
+          </a:xfrm>
+          <a:prstGeom prst="rect">
+            <a:avLst/>
+          </a:prstGeom>
+          <a:solidFill>
+            <a:srgbClr val="FFFFFF"/>
+          </a:solidFill>
+          <a:ln w="12700">
+            <a:solidFill>
+              <a:srgbClr val="D9E0E7"/>
+            </a:solidFill>
+          </a:ln>
+          <a:effectLst/>
+        </p:spPr>
+        <p:style>
+          <a:lnRef idx="1">
+            <a:schemeClr val="accent1"/>
+          </a:lnRef>
+          <a:fillRef idx="3">
+            <a:schemeClr val="accent1"/>
+          </a:fillRef>
+          <a:effectRef idx="2">
+            <a:schemeClr val="accent1"/>
+          </a:effectRef>
+          <a:fontRef idx="minor">
+            <a:schemeClr val="lt1"/>
+          </a:fontRef>
+        </p:style>
+        <p:txBody>
+          <a:bodyPr rtlCol="0" anchor="ctr"/>
+          <a:lstStyle/>
+          <a:p>
+            <a:pPr algn="ctr"/>
+          </a:p>
+        </p:txBody>
+      </p:sp>
+      <p:sp>
+        <p:nvSpPr>
+          <p:cNvPr id="14" name="TextBox 13"/>
+          <p:cNvSpPr txBox="1"/>
+          <p:nvPr/>
+        </p:nvSpPr>
+        <p:spPr>
+          <a:xfrm>
+            <a:off x="2834640" y="1682496"/>
+            <a:ext cx="8595360" cy="457200"/>
+          </a:xfrm>
+          <a:prstGeom prst="rect">
+            <a:avLst/>
+          </a:prstGeom>
+          <a:noFill/>
+        </p:spPr>
+        <p:txBody>
+          <a:bodyPr wrap="square" anchor="ctr">
+            <a:spAutoFit/>
+          </a:bodyPr>
+          <a:lstStyle/>
+          <a:p>
+            <a:pPr algn="l">
+              <a:lnSpc>
+                <a:spcPct val="105000"/>
+              </a:lnSpc>
+              <a:spcAft>
+                <a:spcPts val="600"/>
+              </a:spcAft>
+            </a:pPr>
+            <a:r>
+              <a:rPr sz="1500" b="0">
+                <a:solidFill>
+                  <a:srgbClr val="33383F"/>
+                </a:solidFill>
+                <a:latin typeface="Calibri"/>
+              </a:rPr>
+              <a:t>Situation assessment + a unified KPI data dictionary (entity-confirmed)</a:t>
+            </a:r>
+          </a:p>
+        </p:txBody>
+      </p:sp>
+      <p:sp>
+        <p:nvSpPr>
+          <p:cNvPr id="15" name="Rectangle 14"/>
+          <p:cNvSpPr/>
+          <p:nvPr/>
+        </p:nvSpPr>
+        <p:spPr>
+          <a:xfrm>
+            <a:off x="640080" y="2487168"/>
+            <a:ext cx="1828800" cy="896112"/>
+          </a:xfrm>
+          <a:prstGeom prst="rect">
+            <a:avLst/>
+          </a:prstGeom>
+          <a:solidFill>
+            <a:srgbClr val="178F80"/>
+          </a:solidFill>
+          <a:ln>
+            <a:noFill/>
+          </a:ln>
+          <a:effectLst/>
+        </p:spPr>
+        <p:style>
+          <a:lnRef idx="1">
+            <a:schemeClr val="accent1"/>
+          </a:lnRef>
+          <a:fillRef idx="3">
+            <a:schemeClr val="accent1"/>
+          </a:fillRef>
+          <a:effectRef idx="2">
+            <a:schemeClr val="accent1"/>
+          </a:effectRef>
+          <a:fontRef idx="minor">
+            <a:schemeClr val="lt1"/>
+          </a:fontRef>
+        </p:style>
+        <p:txBody>
+          <a:bodyPr rtlCol="0" anchor="ctr"/>
+          <a:lstStyle/>
+          <a:p>
+            <a:pPr algn="ctr"/>
+          </a:p>
+        </p:txBody>
+      </p:sp>
+      <p:sp>
+        <p:nvSpPr>
+          <p:cNvPr id="16" name="TextBox 15"/>
+          <p:cNvSpPr txBox="1"/>
+          <p:nvPr/>
+        </p:nvSpPr>
+        <p:spPr>
+          <a:xfrm>
+            <a:off x="640080" y="2706624"/>
+            <a:ext cx="1828800" cy="457200"/>
+          </a:xfrm>
+          <a:prstGeom prst="rect">
+            <a:avLst/>
+          </a:prstGeom>
+          <a:noFill/>
+        </p:spPr>
+        <p:txBody>
+          <a:bodyPr wrap="square" anchor="t">
+            <a:spAutoFit/>
+          </a:bodyPr>
+          <a:lstStyle/>
+          <a:p>
+            <a:pPr algn="ctr">
+              <a:lnSpc>
+                <a:spcPct val="105000"/>
+              </a:lnSpc>
+              <a:spcAft>
+                <a:spcPts val="600"/>
+              </a:spcAft>
+            </a:pPr>
+            <a:r>
+              <a:rPr sz="2000" b="1">
+                <a:solidFill>
+                  <a:srgbClr val="FFFFFF"/>
+                </a:solidFill>
+                <a:latin typeface="Calibri"/>
+              </a:rPr>
+              <a:t>60 days</a:t>
+            </a:r>
+          </a:p>
+        </p:txBody>
+      </p:sp>
+      <p:sp>
+        <p:nvSpPr>
+          <p:cNvPr id="17" name="Rectangle 16"/>
+          <p:cNvSpPr/>
+          <p:nvPr/>
+        </p:nvSpPr>
+        <p:spPr>
+          <a:xfrm>
+            <a:off x="2651760" y="2487168"/>
+            <a:ext cx="8961120" cy="896112"/>
+          </a:xfrm>
+          <a:prstGeom prst="rect">
+            <a:avLst/>
+          </a:prstGeom>
+          <a:solidFill>
+            <a:srgbClr val="FFFFFF"/>
+          </a:solidFill>
+          <a:ln w="12700">
+            <a:solidFill>
+              <a:srgbClr val="D9E0E7"/>
+            </a:solidFill>
+          </a:ln>
+          <a:effectLst/>
+        </p:spPr>
+        <p:style>
+          <a:lnRef idx="1">
+            <a:schemeClr val="accent1"/>
+          </a:lnRef>
+          <a:fillRef idx="3">
+            <a:schemeClr val="accent1"/>
+          </a:fillRef>
+          <a:effectRef idx="2">
+            <a:schemeClr val="accent1"/>
+          </a:effectRef>
+          <a:fontRef idx="minor">
+            <a:schemeClr val="lt1"/>
+          </a:fontRef>
+        </p:style>
+        <p:txBody>
+          <a:bodyPr rtlCol="0" anchor="ctr"/>
+          <a:lstStyle/>
+          <a:p>
+            <a:pPr algn="ctr"/>
+          </a:p>
+        </p:txBody>
+      </p:sp>
+      <p:sp>
+        <p:nvSpPr>
+          <p:cNvPr id="18" name="TextBox 17"/>
+          <p:cNvSpPr txBox="1"/>
+          <p:nvPr/>
+        </p:nvSpPr>
+        <p:spPr>
+          <a:xfrm>
+            <a:off x="2834640" y="2706624"/>
+            <a:ext cx="8595360" cy="457200"/>
+          </a:xfrm>
+          <a:prstGeom prst="rect">
+            <a:avLst/>
+          </a:prstGeom>
+          <a:noFill/>
+        </p:spPr>
+        <p:txBody>
+          <a:bodyPr wrap="square" anchor="ctr">
+            <a:spAutoFit/>
+          </a:bodyPr>
+          <a:lstStyle/>
+          <a:p>
+            <a:pPr algn="l">
+              <a:lnSpc>
+                <a:spcPct val="105000"/>
+              </a:lnSpc>
+              <a:spcAft>
+                <a:spcPts val="600"/>
+              </a:spcAft>
+            </a:pPr>
+            <a:r>
+              <a:rPr sz="1500" b="0">
+                <a:solidFill>
+                  <a:srgbClr val="33383F"/>
+                </a:solidFill>
+                <a:latin typeface="Calibri"/>
+              </a:rPr>
+              <a:t>Automate the monthly consolidation; first report Day 4 → Day 2</a:t>
+            </a:r>
+          </a:p>
+        </p:txBody>
+      </p:sp>
+      <p:sp>
+        <p:nvSpPr>
+          <p:cNvPr id="19" name="Rectangle 18"/>
+          <p:cNvSpPr/>
+          <p:nvPr/>
+        </p:nvSpPr>
+        <p:spPr>
+          <a:xfrm>
+            <a:off x="640080" y="3511296"/>
+            <a:ext cx="1828800" cy="896112"/>
+          </a:xfrm>
+          <a:prstGeom prst="rect">
+            <a:avLst/>
+          </a:prstGeom>
+          <a:solidFill>
+            <a:srgbClr val="178F80"/>
+          </a:solidFill>
+          <a:ln>
+            <a:noFill/>
+          </a:ln>
+          <a:effectLst/>
+        </p:spPr>
+        <p:style>
+          <a:lnRef idx="1">
+            <a:schemeClr val="accent1"/>
+          </a:lnRef>
+          <a:fillRef idx="3">
+            <a:schemeClr val="accent1"/>
+          </a:fillRef>
+          <a:effectRef idx="2">
+            <a:schemeClr val="accent1"/>
+          </a:effectRef>
+          <a:fontRef idx="minor">
+            <a:schemeClr val="lt1"/>
+          </a:fontRef>
+        </p:style>
+        <p:txBody>
+          <a:bodyPr rtlCol="0" anchor="ctr"/>
+          <a:lstStyle/>
+          <a:p>
+            <a:pPr algn="ctr"/>
+          </a:p>
+        </p:txBody>
+      </p:sp>
+      <p:sp>
+        <p:nvSpPr>
+          <p:cNvPr id="20" name="TextBox 19"/>
+          <p:cNvSpPr txBox="1"/>
+          <p:nvPr/>
+        </p:nvSpPr>
+        <p:spPr>
+          <a:xfrm>
+            <a:off x="640080" y="3730752"/>
+            <a:ext cx="1828800" cy="457200"/>
+          </a:xfrm>
+          <a:prstGeom prst="rect">
+            <a:avLst/>
+          </a:prstGeom>
+          <a:noFill/>
+        </p:spPr>
+        <p:txBody>
+          <a:bodyPr wrap="square" anchor="t">
+            <a:spAutoFit/>
+          </a:bodyPr>
+          <a:lstStyle/>
+          <a:p>
+            <a:pPr algn="ctr">
+              <a:lnSpc>
+                <a:spcPct val="105000"/>
+              </a:lnSpc>
+              <a:spcAft>
+                <a:spcPts val="600"/>
+              </a:spcAft>
+            </a:pPr>
+            <a:r>
+              <a:rPr sz="2000" b="1">
+                <a:solidFill>
+                  <a:srgbClr val="FFFFFF"/>
+                </a:solidFill>
+                <a:latin typeface="Calibri"/>
+              </a:rPr>
+              <a:t>90 days</a:t>
+            </a:r>
+          </a:p>
+        </p:txBody>
+      </p:sp>
+      <p:sp>
+        <p:nvSpPr>
+          <p:cNvPr id="21" name="Rectangle 20"/>
+          <p:cNvSpPr/>
+          <p:nvPr/>
+        </p:nvSpPr>
+        <p:spPr>
+          <a:xfrm>
+            <a:off x="2651760" y="3511296"/>
+            <a:ext cx="8961120" cy="896112"/>
+          </a:xfrm>
+          <a:prstGeom prst="rect">
+            <a:avLst/>
+          </a:prstGeom>
+          <a:solidFill>
+            <a:srgbClr val="FFFFFF"/>
+          </a:solidFill>
+          <a:ln w="12700">
+            <a:solidFill>
+              <a:srgbClr val="D9E0E7"/>
+            </a:solidFill>
+          </a:ln>
+          <a:effectLst/>
+        </p:spPr>
+        <p:style>
+          <a:lnRef idx="1">
+            <a:schemeClr val="accent1"/>
+          </a:lnRef>
+          <a:fillRef idx="3">
+            <a:schemeClr val="accent1"/>
+          </a:fillRef>
+          <a:effectRef idx="2">
+            <a:schemeClr val="accent1"/>
+          </a:effectRef>
+          <a:fontRef idx="minor">
+            <a:schemeClr val="lt1"/>
+          </a:fontRef>
+        </p:style>
+        <p:txBody>
+          <a:bodyPr rtlCol="0" anchor="ctr"/>
+          <a:lstStyle/>
+          <a:p>
+            <a:pPr algn="ctr"/>
+          </a:p>
+        </p:txBody>
+      </p:sp>
+      <p:sp>
+        <p:nvSpPr>
+          <p:cNvPr id="22" name="TextBox 21"/>
+          <p:cNvSpPr txBox="1"/>
+          <p:nvPr/>
+        </p:nvSpPr>
+        <p:spPr>
+          <a:xfrm>
+            <a:off x="2834640" y="3730752"/>
+            <a:ext cx="8595360" cy="457200"/>
+          </a:xfrm>
+          <a:prstGeom prst="rect">
+            <a:avLst/>
+          </a:prstGeom>
+          <a:noFill/>
+        </p:spPr>
+        <p:txBody>
+          <a:bodyPr wrap="square" anchor="ctr">
+            <a:spAutoFit/>
+          </a:bodyPr>
+          <a:lstStyle/>
+          <a:p>
+            <a:pPr algn="l">
+              <a:lnSpc>
+                <a:spcPct val="105000"/>
+              </a:lnSpc>
+              <a:spcAft>
+                <a:spcPts val="600"/>
+              </a:spcAft>
+            </a:pPr>
+            <a:r>
+              <a:rPr sz="1500" b="0">
+                <a:solidFill>
+                  <a:srgbClr val="33383F"/>
+                </a:solidFill>
+                <a:latin typeface="Calibri"/>
+              </a:rPr>
+              <a:t>Launch the first self-service management dashboard (single version of truth)</a:t>
+            </a:r>
+          </a:p>
+        </p:txBody>
+      </p:sp>
+      <p:sp>
+        <p:nvSpPr>
+          <p:cNvPr id="23" name="Rectangle 22"/>
+          <p:cNvSpPr/>
+          <p:nvPr/>
+        </p:nvSpPr>
+        <p:spPr>
+          <a:xfrm>
+            <a:off x="640080" y="4709160"/>
+            <a:ext cx="10972800" cy="1371600"/>
+          </a:xfrm>
+          <a:prstGeom prst="rect">
+            <a:avLst/>
+          </a:prstGeom>
+          <a:solidFill>
+            <a:srgbClr val="1F3A5F"/>
+          </a:solidFill>
+          <a:ln>
+            <a:noFill/>
+          </a:ln>
+          <a:effectLst/>
+        </p:spPr>
+        <p:style>
+          <a:lnRef idx="1">
+            <a:schemeClr val="accent1"/>
+          </a:lnRef>
+          <a:fillRef idx="3">
+            <a:schemeClr val="accent1"/>
+          </a:fillRef>
+          <a:effectRef idx="2">
+            <a:schemeClr val="accent1"/>
+          </a:effectRef>
+          <a:fontRef idx="minor">
+            <a:schemeClr val="lt1"/>
+          </a:fontRef>
+        </p:style>
+        <p:txBody>
+          <a:bodyPr rtlCol="0" anchor="ctr"/>
+          <a:lstStyle/>
+          <a:p>
+            <a:pPr algn="ctr"/>
+          </a:p>
+        </p:txBody>
+      </p:sp>
+      <p:sp>
+        <p:nvSpPr>
+          <p:cNvPr id="24" name="TextBox 23"/>
+          <p:cNvSpPr txBox="1"/>
+          <p:nvPr/>
+        </p:nvSpPr>
+        <p:spPr>
+          <a:xfrm>
+            <a:off x="868680" y="4882896"/>
+            <a:ext cx="10607040" cy="1051560"/>
+          </a:xfrm>
+          <a:prstGeom prst="rect">
+            <a:avLst/>
+          </a:prstGeom>
+          <a:noFill/>
+        </p:spPr>
+        <p:txBody>
+          <a:bodyPr wrap="square" anchor="t">
+            <a:spAutoFit/>
+          </a:bodyPr>
+          <a:lstStyle/>
+          <a:p>
+            <a:pPr algn="l">
+              <a:lnSpc>
+                <a:spcPct val="125000"/>
+              </a:lnSpc>
+              <a:spcAft>
+                <a:spcPts val="800"/>
+              </a:spcAft>
+            </a:pPr>
+            <a:r>
+              <a:rPr sz="1500" b="1">
+                <a:solidFill>
+                  <a:srgbClr val="C8A24B"/>
+                </a:solidFill>
+                <a:latin typeface="Calibri"/>
+              </a:rPr>
+              <a:t>THE ASK</a:t>
+            </a:r>
+          </a:p>
+          <a:p>
+            <a:pPr algn="l">
+              <a:lnSpc>
+                <a:spcPct val="125000"/>
+              </a:lnSpc>
+              <a:spcAft>
+                <a:spcPts val="800"/>
+              </a:spcAft>
+            </a:pPr>
+            <a:r>
+              <a:rPr sz="1800" b="1">
+                <a:solidFill>
+                  <a:srgbClr val="FFFFFF"/>
+                </a:solidFill>
+                <a:latin typeface="Calibri"/>
+              </a:rPr>
+              <a:t>Please authorize me to lead the KPI alignment and nominate one data contact per entity.</a:t>
+            </a:r>
+          </a:p>
+        </p:txBody>
+      </p:sp>
+    </p:spTree>
+  </p:cSld>
+  <p:clrMapOvr>
+    <a:masterClrMapping/>
+  </p:clrMapOvr>
+</p:sld>
+</file>
+
+<file path=ppt/slides/slide16.xml><?xml version="1.0" encoding="utf-8"?>
+<p:sld xmlns:a="http://schemas.openxmlformats.org/drawingml/2006/main" xmlns:p="http://schemas.openxmlformats.org/presentationml/2006/main" xmlns:r="http://schemas.openxmlformats.org/officeDocument/2006/relationships">
+  <p:cSld>
+    <p:spTree>
+      <p:nvGrpSpPr>
+        <p:cNvPr id="1" name=""/>
+        <p:cNvGrpSpPr/>
+        <p:nvPr/>
+      </p:nvGrpSpPr>
+      <p:grpSpPr/>
+      <p:sp>
+        <p:nvSpPr>
+          <p:cNvPr id="2" name="Rectangle 1"/>
+          <p:cNvSpPr/>
+          <p:nvPr/>
+        </p:nvSpPr>
+        <p:spPr>
+          <a:xfrm>
+            <a:off x="0" y="0"/>
+            <a:ext cx="12191695" cy="6858000"/>
+          </a:xfrm>
+          <a:prstGeom prst="rect">
+            <a:avLst/>
+          </a:prstGeom>
+          <a:solidFill>
             <a:srgbClr val="1F3A5F"/>
           </a:solidFill>
           <a:ln>
@@ -10892,7 +13631,7 @@
         </p:nvSpPr>
         <p:spPr>
           <a:xfrm>
-            <a:off x="6263640" y="1417320"/>
+            <a:off x="640080" y="5916168"/>
             <a:ext cx="566928" cy="566928"/>
           </a:xfrm>
           <a:prstGeom prst="rect">
@@ -10936,7 +13675,7 @@
         </p:nvSpPr>
         <p:spPr>
           <a:xfrm>
-            <a:off x="6263640" y="1481328"/>
+            <a:off x="640080" y="5980176"/>
             <a:ext cx="566928" cy="457200"/>
           </a:xfrm>
           <a:prstGeom prst="rect">
@@ -10978,7 +13717,7 @@
         </p:nvSpPr>
         <p:spPr>
           <a:xfrm>
-            <a:off x="6995160" y="1435608"/>
+            <a:off x="1371600" y="5934456"/>
             <a:ext cx="4480560" cy="365760"/>
           </a:xfrm>
           <a:prstGeom prst="rect">
@@ -11020,7 +13759,7 @@
         </p:nvSpPr>
         <p:spPr>
           <a:xfrm>
-            <a:off x="6995160" y="1755648"/>
+            <a:off x="1371600" y="6254496"/>
             <a:ext cx="4480560" cy="320040"/>
           </a:xfrm>
           <a:prstGeom prst="rect">
@@ -11062,7 +13801,7 @@
         </p:nvSpPr>
         <p:spPr>
           <a:xfrm>
-            <a:off x="6263640" y="2167128"/>
+            <a:off x="6263640" y="1417320"/>
             <a:ext cx="566928" cy="566928"/>
           </a:xfrm>
           <a:prstGeom prst="rect">
@@ -11106,7 +13845,7 @@
         </p:nvSpPr>
         <p:spPr>
           <a:xfrm>
-            <a:off x="6263640" y="2231136"/>
+            <a:off x="6263640" y="1481328"/>
             <a:ext cx="566928" cy="457200"/>
           </a:xfrm>
           <a:prstGeom prst="rect">
@@ -11148,7 +13887,7 @@
         </p:nvSpPr>
         <p:spPr>
           <a:xfrm>
-            <a:off x="6995160" y="2185416"/>
+            <a:off x="6995160" y="1435608"/>
             <a:ext cx="4480560" cy="365760"/>
           </a:xfrm>
           <a:prstGeom prst="rect">
@@ -11190,7 +13929,7 @@
         </p:nvSpPr>
         <p:spPr>
           <a:xfrm>
-            <a:off x="6995160" y="2505456"/>
+            <a:off x="6995160" y="1755648"/>
             <a:ext cx="4480560" cy="320040"/>
           </a:xfrm>
           <a:prstGeom prst="rect">
@@ -11232,7 +13971,7 @@
         </p:nvSpPr>
         <p:spPr>
           <a:xfrm>
-            <a:off x="6263640" y="2916936"/>
+            <a:off x="6263640" y="2167128"/>
             <a:ext cx="566928" cy="566928"/>
           </a:xfrm>
           <a:prstGeom prst="rect">
@@ -11276,7 +14015,7 @@
         </p:nvSpPr>
         <p:spPr>
           <a:xfrm>
-            <a:off x="6263640" y="2980944"/>
+            <a:off x="6263640" y="2231136"/>
             <a:ext cx="566928" cy="457200"/>
           </a:xfrm>
           <a:prstGeom prst="rect">
@@ -11318,7 +14057,7 @@
         </p:nvSpPr>
         <p:spPr>
           <a:xfrm>
-            <a:off x="6995160" y="2935224"/>
+            <a:off x="6995160" y="2185416"/>
             <a:ext cx="4480560" cy="365760"/>
           </a:xfrm>
           <a:prstGeom prst="rect">
@@ -11360,7 +14099,7 @@
         </p:nvSpPr>
         <p:spPr>
           <a:xfrm>
-            <a:off x="6995160" y="3255264"/>
+            <a:off x="6995160" y="2505456"/>
             <a:ext cx="4480560" cy="320040"/>
           </a:xfrm>
           <a:prstGeom prst="rect">
@@ -11402,7 +14141,7 @@
         </p:nvSpPr>
         <p:spPr>
           <a:xfrm>
-            <a:off x="6263640" y="3666744"/>
+            <a:off x="6263640" y="2916936"/>
             <a:ext cx="566928" cy="566928"/>
           </a:xfrm>
           <a:prstGeom prst="rect">
@@ -11446,7 +14185,7 @@
         </p:nvSpPr>
         <p:spPr>
           <a:xfrm>
-            <a:off x="6263640" y="3730752"/>
+            <a:off x="6263640" y="2980944"/>
             <a:ext cx="566928" cy="457200"/>
           </a:xfrm>
           <a:prstGeom prst="rect">
@@ -11488,7 +14227,7 @@
         </p:nvSpPr>
         <p:spPr>
           <a:xfrm>
-            <a:off x="6995160" y="3685032"/>
+            <a:off x="6995160" y="2935224"/>
             <a:ext cx="4480560" cy="365760"/>
           </a:xfrm>
           <a:prstGeom prst="rect">
@@ -11530,7 +14269,7 @@
         </p:nvSpPr>
         <p:spPr>
           <a:xfrm>
-            <a:off x="6995160" y="4005072"/>
+            <a:off x="6995160" y="3255264"/>
             <a:ext cx="4480560" cy="320040"/>
           </a:xfrm>
           <a:prstGeom prst="rect">
@@ -11572,7 +14311,7 @@
         </p:nvSpPr>
         <p:spPr>
           <a:xfrm>
-            <a:off x="6263640" y="4416552"/>
+            <a:off x="6263640" y="3666744"/>
             <a:ext cx="566928" cy="566928"/>
           </a:xfrm>
           <a:prstGeom prst="rect">
@@ -11616,7 +14355,7 @@
         </p:nvSpPr>
         <p:spPr>
           <a:xfrm>
-            <a:off x="6263640" y="4480560"/>
+            <a:off x="6263640" y="3730752"/>
             <a:ext cx="566928" cy="457200"/>
           </a:xfrm>
           <a:prstGeom prst="rect">
@@ -11658,7 +14397,7 @@
         </p:nvSpPr>
         <p:spPr>
           <a:xfrm>
-            <a:off x="6995160" y="4434840"/>
+            <a:off x="6995160" y="3685032"/>
             <a:ext cx="4480560" cy="365760"/>
           </a:xfrm>
           <a:prstGeom prst="rect">
@@ -11700,7 +14439,7 @@
         </p:nvSpPr>
         <p:spPr>
           <a:xfrm>
-            <a:off x="6995160" y="4754880"/>
+            <a:off x="6995160" y="4005072"/>
             <a:ext cx="4480560" cy="320040"/>
           </a:xfrm>
           <a:prstGeom prst="rect">
@@ -11742,7 +14481,7 @@
         </p:nvSpPr>
         <p:spPr>
           <a:xfrm>
-            <a:off x="6263640" y="5166360"/>
+            <a:off x="6263640" y="4416552"/>
             <a:ext cx="566928" cy="566928"/>
           </a:xfrm>
           <a:prstGeom prst="rect">
@@ -11786,7 +14525,7 @@
         </p:nvSpPr>
         <p:spPr>
           <a:xfrm>
-            <a:off x="6263640" y="5230368"/>
+            <a:off x="6263640" y="4480560"/>
             <a:ext cx="566928" cy="457200"/>
           </a:xfrm>
           <a:prstGeom prst="rect">
@@ -11828,7 +14567,7 @@
         </p:nvSpPr>
         <p:spPr>
           <a:xfrm>
-            <a:off x="6995160" y="5184648"/>
+            <a:off x="6995160" y="4434840"/>
             <a:ext cx="4480560" cy="365760"/>
           </a:xfrm>
           <a:prstGeom prst="rect">
@@ -11857,6 +14596,176 @@
                 </a:solidFill>
                 <a:latin typeface="Calibri"/>
               </a:rPr>
+              <a:t>Future Vision — AI-run Finance</a:t>
+            </a:r>
+          </a:p>
+        </p:txBody>
+      </p:sp>
+      <p:sp>
+        <p:nvSpPr>
+          <p:cNvPr id="58" name="TextBox 57"/>
+          <p:cNvSpPr txBox="1"/>
+          <p:nvPr/>
+        </p:nvSpPr>
+        <p:spPr>
+          <a:xfrm>
+            <a:off x="6995160" y="4754880"/>
+            <a:ext cx="4480560" cy="320040"/>
+          </a:xfrm>
+          <a:prstGeom prst="rect">
+            <a:avLst/>
+          </a:prstGeom>
+          <a:noFill/>
+        </p:spPr>
+        <p:txBody>
+          <a:bodyPr wrap="square" anchor="t">
+            <a:spAutoFit/>
+          </a:bodyPr>
+          <a:lstStyle/>
+          <a:p>
+            <a:pPr algn="l">
+              <a:lnSpc>
+                <a:spcPct val="105000"/>
+              </a:lnSpc>
+              <a:spcAft>
+                <a:spcPts val="600"/>
+              </a:spcAft>
+            </a:pPr>
+            <a:r>
+              <a:rPr sz="1100" b="0">
+                <a:solidFill>
+                  <a:srgbClr val="5A6B7B"/>
+                </a:solidFill>
+                <a:latin typeface="Calibri"/>
+              </a:rPr>
+              <a:t>AI executes; people manage &amp; create</a:t>
+            </a:r>
+          </a:p>
+        </p:txBody>
+      </p:sp>
+      <p:sp>
+        <p:nvSpPr>
+          <p:cNvPr id="59" name="Rectangle 58"/>
+          <p:cNvSpPr/>
+          <p:nvPr/>
+        </p:nvSpPr>
+        <p:spPr>
+          <a:xfrm>
+            <a:off x="6263640" y="5166360"/>
+            <a:ext cx="566928" cy="566928"/>
+          </a:xfrm>
+          <a:prstGeom prst="rect">
+            <a:avLst/>
+          </a:prstGeom>
+          <a:solidFill>
+            <a:srgbClr val="1F3A5F"/>
+          </a:solidFill>
+          <a:ln>
+            <a:noFill/>
+          </a:ln>
+          <a:effectLst/>
+        </p:spPr>
+        <p:style>
+          <a:lnRef idx="1">
+            <a:schemeClr val="accent1"/>
+          </a:lnRef>
+          <a:fillRef idx="3">
+            <a:schemeClr val="accent1"/>
+          </a:fillRef>
+          <a:effectRef idx="2">
+            <a:schemeClr val="accent1"/>
+          </a:effectRef>
+          <a:fontRef idx="minor">
+            <a:schemeClr val="lt1"/>
+          </a:fontRef>
+        </p:style>
+        <p:txBody>
+          <a:bodyPr rtlCol="0" anchor="ctr"/>
+          <a:lstStyle/>
+          <a:p>
+            <a:pPr algn="ctr"/>
+          </a:p>
+        </p:txBody>
+      </p:sp>
+      <p:sp>
+        <p:nvSpPr>
+          <p:cNvPr id="60" name="TextBox 59"/>
+          <p:cNvSpPr txBox="1"/>
+          <p:nvPr/>
+        </p:nvSpPr>
+        <p:spPr>
+          <a:xfrm>
+            <a:off x="6263640" y="5230368"/>
+            <a:ext cx="566928" cy="457200"/>
+          </a:xfrm>
+          <a:prstGeom prst="rect">
+            <a:avLst/>
+          </a:prstGeom>
+          <a:noFill/>
+        </p:spPr>
+        <p:txBody>
+          <a:bodyPr wrap="square" anchor="t">
+            <a:spAutoFit/>
+          </a:bodyPr>
+          <a:lstStyle/>
+          <a:p>
+            <a:pPr algn="ctr">
+              <a:lnSpc>
+                <a:spcPct val="105000"/>
+              </a:lnSpc>
+              <a:spcAft>
+                <a:spcPts val="600"/>
+              </a:spcAft>
+            </a:pPr>
+            <a:r>
+              <a:rPr sz="1500" b="1">
+                <a:solidFill>
+                  <a:srgbClr val="FFFFFF"/>
+                </a:solidFill>
+                <a:latin typeface="Calibri"/>
+              </a:rPr>
+              <a:t>13</a:t>
+            </a:r>
+          </a:p>
+        </p:txBody>
+      </p:sp>
+      <p:sp>
+        <p:nvSpPr>
+          <p:cNvPr id="61" name="TextBox 60"/>
+          <p:cNvSpPr txBox="1"/>
+          <p:nvPr/>
+        </p:nvSpPr>
+        <p:spPr>
+          <a:xfrm>
+            <a:off x="6995160" y="5184648"/>
+            <a:ext cx="4480560" cy="365760"/>
+          </a:xfrm>
+          <a:prstGeom prst="rect">
+            <a:avLst/>
+          </a:prstGeom>
+          <a:noFill/>
+        </p:spPr>
+        <p:txBody>
+          <a:bodyPr wrap="square" anchor="t">
+            <a:spAutoFit/>
+          </a:bodyPr>
+          <a:lstStyle/>
+          <a:p>
+            <a:pPr algn="l">
+              <a:lnSpc>
+                <a:spcPct val="105000"/>
+              </a:lnSpc>
+              <a:spcAft>
+                <a:spcPts val="600"/>
+              </a:spcAft>
+            </a:pPr>
+            <a:r>
+              <a:rPr sz="1450" b="1">
+                <a:solidFill>
+                  <a:srgbClr val="1F3A5F"/>
+                </a:solidFill>
+                <a:latin typeface="Calibri"/>
+              </a:rPr>
               <a:t>First 90 Days &amp; The Ask</a:t>
             </a:r>
           </a:p>
@@ -11864,7 +14773,7 @@
       </p:sp>
       <p:sp>
         <p:nvSpPr>
-          <p:cNvPr id="58" name="TextBox 57"/>
+          <p:cNvPr id="62" name="TextBox 61"/>
           <p:cNvSpPr txBox="1"/>
           <p:nvPr/>
         </p:nvSpPr>
